--- a/Pregrado/Trabajo de grado 3/Clases/Sesion 11 - Póster · evidencias · verificación antiplagio/Presentacion.pptx
+++ b/Pregrado/Trabajo de grado 3/Clases/Sesion 11 - Póster · evidencias · verificación antiplagio/Presentacion.pptx
@@ -3372,41 +3372,6 @@
           </a:p>
         </p:txBody>
       </p:sp>
-      <p:sp>
-        <p:nvSpPr>
-          <p:cNvPr id="7" name="TextBox 6"/>
-          <p:cNvSpPr txBox="1"/>
-          <p:nvPr/>
-        </p:nvSpPr>
-        <p:spPr>
-          <a:xfrm>
-            <a:off x="2194560" y="6446520"/>
-            <a:ext cx="5943600" cy="274320"/>
-          </a:xfrm>
-          <a:prstGeom prst="rect">
-            <a:avLst/>
-          </a:prstGeom>
-          <a:noFill/>
-        </p:spPr>
-        <p:txBody>
-          <a:bodyPr wrap="square" anchor="t" lIns="0" rIns="0" tIns="0" bIns="0">
-            <a:spAutoFit/>
-          </a:bodyPr>
-          <a:lstStyle/>
-          <a:p>
-            <a:pPr algn="l"/>
-            <a:r>
-              <a:rPr sz="1000" b="1" i="0">
-                <a:solidFill>
-                  <a:srgbClr val="8F989D"/>
-                </a:solidFill>
-                <a:latin typeface="Calibri"/>
-              </a:rPr>
-              <a:t>Inicio 5:10 pm</a:t>
-            </a:r>
-          </a:p>
-        </p:txBody>
-      </p:sp>
     </p:spTree>
   </p:cSld>
   <p:clrMapOvr>
@@ -3797,41 +3762,6 @@
         </p:nvSpPr>
         <p:spPr>
           <a:xfrm>
-            <a:off x="2194560" y="6446520"/>
-            <a:ext cx="5943600" cy="274320"/>
-          </a:xfrm>
-          <a:prstGeom prst="rect">
-            <a:avLst/>
-          </a:prstGeom>
-          <a:noFill/>
-        </p:spPr>
-        <p:txBody>
-          <a:bodyPr wrap="square" anchor="t" lIns="0" rIns="0" tIns="0" bIns="0">
-            <a:spAutoFit/>
-          </a:bodyPr>
-          <a:lstStyle/>
-          <a:p>
-            <a:pPr algn="l"/>
-            <a:r>
-              <a:rPr sz="1000" b="1" i="0">
-                <a:solidFill>
-                  <a:srgbClr val="8F989D"/>
-                </a:solidFill>
-                <a:latin typeface="Calibri"/>
-              </a:rPr>
-              <a:t>Inicio 5:10 pm</a:t>
-            </a:r>
-          </a:p>
-        </p:txBody>
-      </p:sp>
-      <p:sp>
-        <p:nvSpPr>
-          <p:cNvPr id="6" name="TextBox 5"/>
-          <p:cNvSpPr txBox="1"/>
-          <p:nvPr/>
-        </p:nvSpPr>
-        <p:spPr>
-          <a:xfrm>
             <a:off x="11094415" y="6446520"/>
             <a:ext cx="548640" cy="274320"/>
           </a:xfrm>
@@ -4108,41 +4038,6 @@
       <p:sp>
         <p:nvSpPr>
           <p:cNvPr id="5" name="TextBox 4"/>
-          <p:cNvSpPr txBox="1"/>
-          <p:nvPr/>
-        </p:nvSpPr>
-        <p:spPr>
-          <a:xfrm>
-            <a:off x="2194560" y="6446520"/>
-            <a:ext cx="5943600" cy="274320"/>
-          </a:xfrm>
-          <a:prstGeom prst="rect">
-            <a:avLst/>
-          </a:prstGeom>
-          <a:noFill/>
-        </p:spPr>
-        <p:txBody>
-          <a:bodyPr wrap="square" anchor="t" lIns="0" rIns="0" tIns="0" bIns="0">
-            <a:spAutoFit/>
-          </a:bodyPr>
-          <a:lstStyle/>
-          <a:p>
-            <a:pPr algn="l"/>
-            <a:r>
-              <a:rPr sz="1000" b="1" i="0">
-                <a:solidFill>
-                  <a:srgbClr val="8F989D"/>
-                </a:solidFill>
-                <a:latin typeface="Calibri"/>
-              </a:rPr>
-              <a:t>Inicio 5:10 pm</a:t>
-            </a:r>
-          </a:p>
-        </p:txBody>
-      </p:sp>
-      <p:sp>
-        <p:nvSpPr>
-          <p:cNvPr id="6" name="TextBox 5"/>
           <p:cNvSpPr txBox="1"/>
           <p:nvPr/>
         </p:nvSpPr>
@@ -4932,41 +4827,6 @@
         </p:nvSpPr>
         <p:spPr>
           <a:xfrm>
-            <a:off x="2194560" y="6446520"/>
-            <a:ext cx="5943600" cy="274320"/>
-          </a:xfrm>
-          <a:prstGeom prst="rect">
-            <a:avLst/>
-          </a:prstGeom>
-          <a:noFill/>
-        </p:spPr>
-        <p:txBody>
-          <a:bodyPr wrap="square" anchor="t" lIns="0" rIns="0" tIns="0" bIns="0">
-            <a:spAutoFit/>
-          </a:bodyPr>
-          <a:lstStyle/>
-          <a:p>
-            <a:pPr algn="l"/>
-            <a:r>
-              <a:rPr sz="1000" b="1" i="0">
-                <a:solidFill>
-                  <a:srgbClr val="8F989D"/>
-                </a:solidFill>
-                <a:latin typeface="Calibri"/>
-              </a:rPr>
-              <a:t>Inicio 5:10 pm</a:t>
-            </a:r>
-          </a:p>
-        </p:txBody>
-      </p:sp>
-      <p:sp>
-        <p:nvSpPr>
-          <p:cNvPr id="7" name="TextBox 6"/>
-          <p:cNvSpPr txBox="1"/>
-          <p:nvPr/>
-        </p:nvSpPr>
-        <p:spPr>
-          <a:xfrm>
             <a:off x="11094415" y="6446520"/>
             <a:ext cx="548640" cy="274320"/>
           </a:xfrm>
@@ -5282,41 +5142,6 @@
         </p:nvSpPr>
         <p:spPr>
           <a:xfrm>
-            <a:off x="2194560" y="6446520"/>
-            <a:ext cx="5943600" cy="274320"/>
-          </a:xfrm>
-          <a:prstGeom prst="rect">
-            <a:avLst/>
-          </a:prstGeom>
-          <a:noFill/>
-        </p:spPr>
-        <p:txBody>
-          <a:bodyPr wrap="square" anchor="t" lIns="0" rIns="0" tIns="0" bIns="0">
-            <a:spAutoFit/>
-          </a:bodyPr>
-          <a:lstStyle/>
-          <a:p>
-            <a:pPr algn="l"/>
-            <a:r>
-              <a:rPr sz="1000" b="1" i="0">
-                <a:solidFill>
-                  <a:srgbClr val="8F989D"/>
-                </a:solidFill>
-                <a:latin typeface="Calibri"/>
-              </a:rPr>
-              <a:t>Inicio 5:10 pm</a:t>
-            </a:r>
-          </a:p>
-        </p:txBody>
-      </p:sp>
-      <p:sp>
-        <p:nvSpPr>
-          <p:cNvPr id="6" name="TextBox 5"/>
-          <p:cNvSpPr txBox="1"/>
-          <p:nvPr/>
-        </p:nvSpPr>
-        <p:spPr>
-          <a:xfrm>
             <a:off x="11094415" y="6446520"/>
             <a:ext cx="548640" cy="274320"/>
           </a:xfrm>
@@ -5635,7 +5460,7 @@
                 </a:solidFill>
                 <a:latin typeface="Calibri"/>
               </a:rPr>
-              <a:t>–   La verificación se hace por la </a:t>
+              <a:t>–   La revisión se hace por la </a:t>
             </a:r>
             <a:r>
               <a:rPr sz="1600" b="1" i="0">
@@ -5653,6 +5478,24 @@
                 </a:solidFill>
                 <a:latin typeface="Calibri"/>
               </a:rPr>
+              <a:t>, que </a:t>
+            </a:r>
+            <a:r>
+              <a:rPr sz="1600" b="1" i="0">
+                <a:solidFill>
+                  <a:srgbClr val="2B2B2B"/>
+                </a:solidFill>
+                <a:latin typeface="Calibri"/>
+              </a:rPr>
+              <a:t>habilita y confirma el Docente</a:t>
+            </a:r>
+            <a:r>
+              <a:rPr sz="1600" b="0" i="0">
+                <a:solidFill>
+                  <a:srgbClr val="2B2B2B"/>
+                </a:solidFill>
+                <a:latin typeface="Calibri"/>
+              </a:rPr>
               <a:t>, no por páginas de terceros.</a:t>
             </a:r>
           </a:p>
@@ -5661,41 +5504,6 @@
       <p:sp>
         <p:nvSpPr>
           <p:cNvPr id="5" name="TextBox 4"/>
-          <p:cNvSpPr txBox="1"/>
-          <p:nvPr/>
-        </p:nvSpPr>
-        <p:spPr>
-          <a:xfrm>
-            <a:off x="2194560" y="6446520"/>
-            <a:ext cx="5943600" cy="274320"/>
-          </a:xfrm>
-          <a:prstGeom prst="rect">
-            <a:avLst/>
-          </a:prstGeom>
-          <a:noFill/>
-        </p:spPr>
-        <p:txBody>
-          <a:bodyPr wrap="square" anchor="t" lIns="0" rIns="0" tIns="0" bIns="0">
-            <a:spAutoFit/>
-          </a:bodyPr>
-          <a:lstStyle/>
-          <a:p>
-            <a:pPr algn="l"/>
-            <a:r>
-              <a:rPr sz="1000" b="1" i="0">
-                <a:solidFill>
-                  <a:srgbClr val="8F989D"/>
-                </a:solidFill>
-                <a:latin typeface="Calibri"/>
-              </a:rPr>
-              <a:t>Inicio 5:10 pm</a:t>
-            </a:r>
-          </a:p>
-        </p:txBody>
-      </p:sp>
-      <p:sp>
-        <p:nvSpPr>
-          <p:cNvPr id="6" name="TextBox 5"/>
           <p:cNvSpPr txBox="1"/>
           <p:nvPr/>
         </p:nvSpPr>
@@ -6355,41 +6163,6 @@
         </p:nvSpPr>
         <p:spPr>
           <a:xfrm>
-            <a:off x="2194560" y="6446520"/>
-            <a:ext cx="5943600" cy="274320"/>
-          </a:xfrm>
-          <a:prstGeom prst="rect">
-            <a:avLst/>
-          </a:prstGeom>
-          <a:noFill/>
-        </p:spPr>
-        <p:txBody>
-          <a:bodyPr wrap="square" anchor="t" lIns="0" rIns="0" tIns="0" bIns="0">
-            <a:spAutoFit/>
-          </a:bodyPr>
-          <a:lstStyle/>
-          <a:p>
-            <a:pPr algn="l"/>
-            <a:r>
-              <a:rPr sz="1000" b="1" i="0">
-                <a:solidFill>
-                  <a:srgbClr val="8F989D"/>
-                </a:solidFill>
-                <a:latin typeface="Calibri"/>
-              </a:rPr>
-              <a:t>Inicio 5:10 pm</a:t>
-            </a:r>
-          </a:p>
-        </p:txBody>
-      </p:sp>
-      <p:sp>
-        <p:nvSpPr>
-          <p:cNvPr id="7" name="TextBox 6"/>
-          <p:cNvSpPr txBox="1"/>
-          <p:nvPr/>
-        </p:nvSpPr>
-        <p:spPr>
-          <a:xfrm>
             <a:off x="11094415" y="6446520"/>
             <a:ext cx="548640" cy="274320"/>
           </a:xfrm>
@@ -6836,41 +6609,6 @@
         </p:nvSpPr>
         <p:spPr>
           <a:xfrm>
-            <a:off x="2194560" y="6446520"/>
-            <a:ext cx="5943600" cy="274320"/>
-          </a:xfrm>
-          <a:prstGeom prst="rect">
-            <a:avLst/>
-          </a:prstGeom>
-          <a:noFill/>
-        </p:spPr>
-        <p:txBody>
-          <a:bodyPr wrap="square" anchor="t" lIns="0" rIns="0" tIns="0" bIns="0">
-            <a:spAutoFit/>
-          </a:bodyPr>
-          <a:lstStyle/>
-          <a:p>
-            <a:pPr algn="l"/>
-            <a:r>
-              <a:rPr sz="1000" b="1" i="0">
-                <a:solidFill>
-                  <a:srgbClr val="8F989D"/>
-                </a:solidFill>
-                <a:latin typeface="Calibri"/>
-              </a:rPr>
-              <a:t>Inicio 5:10 pm</a:t>
-            </a:r>
-          </a:p>
-        </p:txBody>
-      </p:sp>
-      <p:sp>
-        <p:nvSpPr>
-          <p:cNvPr id="6" name="TextBox 5"/>
-          <p:cNvSpPr txBox="1"/>
-          <p:nvPr/>
-        </p:nvSpPr>
-        <p:spPr>
-          <a:xfrm>
             <a:off x="11094415" y="6446520"/>
             <a:ext cx="548640" cy="274320"/>
           </a:xfrm>
@@ -7423,41 +7161,6 @@
         </p:nvSpPr>
         <p:spPr>
           <a:xfrm>
-            <a:off x="2194560" y="6446520"/>
-            <a:ext cx="5943600" cy="274320"/>
-          </a:xfrm>
-          <a:prstGeom prst="rect">
-            <a:avLst/>
-          </a:prstGeom>
-          <a:noFill/>
-        </p:spPr>
-        <p:txBody>
-          <a:bodyPr wrap="square" anchor="t" lIns="0" rIns="0" tIns="0" bIns="0">
-            <a:spAutoFit/>
-          </a:bodyPr>
-          <a:lstStyle/>
-          <a:p>
-            <a:pPr algn="l"/>
-            <a:r>
-              <a:rPr sz="1000" b="1" i="0">
-                <a:solidFill>
-                  <a:srgbClr val="8F989D"/>
-                </a:solidFill>
-                <a:latin typeface="Calibri"/>
-              </a:rPr>
-              <a:t>Inicio 5:10 pm</a:t>
-            </a:r>
-          </a:p>
-        </p:txBody>
-      </p:sp>
-      <p:sp>
-        <p:nvSpPr>
-          <p:cNvPr id="13" name="TextBox 12"/>
-          <p:cNvSpPr txBox="1"/>
-          <p:nvPr/>
-        </p:nvSpPr>
-        <p:spPr>
-          <a:xfrm>
             <a:off x="11094415" y="6446520"/>
             <a:ext cx="548640" cy="274320"/>
           </a:xfrm>
@@ -8028,41 +7731,6 @@
         </p:nvSpPr>
         <p:spPr>
           <a:xfrm>
-            <a:off x="2194560" y="6446520"/>
-            <a:ext cx="5943600" cy="274320"/>
-          </a:xfrm>
-          <a:prstGeom prst="rect">
-            <a:avLst/>
-          </a:prstGeom>
-          <a:noFill/>
-        </p:spPr>
-        <p:txBody>
-          <a:bodyPr wrap="square" anchor="t" lIns="0" rIns="0" tIns="0" bIns="0">
-            <a:spAutoFit/>
-          </a:bodyPr>
-          <a:lstStyle/>
-          <a:p>
-            <a:pPr algn="l"/>
-            <a:r>
-              <a:rPr sz="1000" b="1" i="0">
-                <a:solidFill>
-                  <a:srgbClr val="8F989D"/>
-                </a:solidFill>
-                <a:latin typeface="Calibri"/>
-              </a:rPr>
-              <a:t>Inicio 5:10 pm</a:t>
-            </a:r>
-          </a:p>
-        </p:txBody>
-      </p:sp>
-      <p:sp>
-        <p:nvSpPr>
-          <p:cNvPr id="13" name="TextBox 12"/>
-          <p:cNvSpPr txBox="1"/>
-          <p:nvPr/>
-        </p:nvSpPr>
-        <p:spPr>
-          <a:xfrm>
             <a:off x="11094415" y="6446520"/>
             <a:ext cx="548640" cy="274320"/>
           </a:xfrm>
@@ -8315,41 +7983,6 @@
         </p:nvSpPr>
         <p:spPr>
           <a:xfrm>
-            <a:off x="2194560" y="6446520"/>
-            <a:ext cx="5943600" cy="274320"/>
-          </a:xfrm>
-          <a:prstGeom prst="rect">
-            <a:avLst/>
-          </a:prstGeom>
-          <a:noFill/>
-        </p:spPr>
-        <p:txBody>
-          <a:bodyPr wrap="square" anchor="t" lIns="0" rIns="0" tIns="0" bIns="0">
-            <a:spAutoFit/>
-          </a:bodyPr>
-          <a:lstStyle/>
-          <a:p>
-            <a:pPr algn="l"/>
-            <a:r>
-              <a:rPr sz="1000" b="1" i="0">
-                <a:solidFill>
-                  <a:srgbClr val="8F989D"/>
-                </a:solidFill>
-                <a:latin typeface="Calibri"/>
-              </a:rPr>
-              <a:t>Inicio 5:10 pm</a:t>
-            </a:r>
-          </a:p>
-        </p:txBody>
-      </p:sp>
-      <p:sp>
-        <p:nvSpPr>
-          <p:cNvPr id="7" name="TextBox 6"/>
-          <p:cNvSpPr txBox="1"/>
-          <p:nvPr/>
-        </p:nvSpPr>
-        <p:spPr>
-          <a:xfrm>
             <a:off x="11094415" y="6446520"/>
             <a:ext cx="548640" cy="274320"/>
           </a:xfrm>
@@ -8882,41 +8515,6 @@
         </p:nvSpPr>
         <p:spPr>
           <a:xfrm>
-            <a:off x="2194560" y="6446520"/>
-            <a:ext cx="5943600" cy="274320"/>
-          </a:xfrm>
-          <a:prstGeom prst="rect">
-            <a:avLst/>
-          </a:prstGeom>
-          <a:noFill/>
-        </p:spPr>
-        <p:txBody>
-          <a:bodyPr wrap="square" anchor="t" lIns="0" rIns="0" tIns="0" bIns="0">
-            <a:spAutoFit/>
-          </a:bodyPr>
-          <a:lstStyle/>
-          <a:p>
-            <a:pPr algn="l"/>
-            <a:r>
-              <a:rPr sz="1000" b="1" i="0">
-                <a:solidFill>
-                  <a:srgbClr val="8F989D"/>
-                </a:solidFill>
-                <a:latin typeface="Calibri"/>
-              </a:rPr>
-              <a:t>Inicio 5:10 pm</a:t>
-            </a:r>
-          </a:p>
-        </p:txBody>
-      </p:sp>
-      <p:sp>
-        <p:nvSpPr>
-          <p:cNvPr id="6" name="TextBox 5"/>
-          <p:cNvSpPr txBox="1"/>
-          <p:nvPr/>
-        </p:nvSpPr>
-        <p:spPr>
-          <a:xfrm>
             <a:off x="11094415" y="6446520"/>
             <a:ext cx="548640" cy="274320"/>
           </a:xfrm>
@@ -8946,7 +8544,7 @@
       </p:sp>
       <p:sp>
         <p:nvSpPr>
-          <p:cNvPr id="7" name="TextBox 6"/>
+          <p:cNvPr id="6" name="TextBox 5"/>
           <p:cNvSpPr txBox="1"/>
           <p:nvPr/>
         </p:nvSpPr>
@@ -9343,7 +8941,7 @@
                 </a:solidFill>
                 <a:latin typeface="Calibri"/>
               </a:rPr>
-              <a:t> Anote la </a:t>
+              <a:t> Deje por escrito </a:t>
             </a:r>
             <a:r>
               <a:rPr sz="1500" b="1" i="0">
@@ -9352,7 +8950,7 @@
                 </a:solidFill>
                 <a:latin typeface="Calibri"/>
               </a:rPr>
-              <a:t>ruta institucional de verificación de similitud</a:t>
+              <a:t>cómo opera la revisión de similitud en el aula</a:t>
             </a:r>
             <a:r>
               <a:rPr sz="1500" b="0" i="0">
@@ -9361,7 +8959,7 @@
                 </a:solidFill>
                 <a:latin typeface="Calibri"/>
               </a:rPr>
-              <a:t> que use el curso en CDigital.</a:t>
+              <a:t> según lo que confirmó el Docente: cuándo ocurre y si el curso pide adjuntar algún informe.</a:t>
             </a:r>
           </a:p>
           <a:p>
@@ -9403,41 +9001,6 @@
       <p:sp>
         <p:nvSpPr>
           <p:cNvPr id="5" name="TextBox 4"/>
-          <p:cNvSpPr txBox="1"/>
-          <p:nvPr/>
-        </p:nvSpPr>
-        <p:spPr>
-          <a:xfrm>
-            <a:off x="2194560" y="6446520"/>
-            <a:ext cx="5943600" cy="274320"/>
-          </a:xfrm>
-          <a:prstGeom prst="rect">
-            <a:avLst/>
-          </a:prstGeom>
-          <a:noFill/>
-        </p:spPr>
-        <p:txBody>
-          <a:bodyPr wrap="square" anchor="t" lIns="0" rIns="0" tIns="0" bIns="0">
-            <a:spAutoFit/>
-          </a:bodyPr>
-          <a:lstStyle/>
-          <a:p>
-            <a:pPr algn="l"/>
-            <a:r>
-              <a:rPr sz="1000" b="1" i="0">
-                <a:solidFill>
-                  <a:srgbClr val="8F989D"/>
-                </a:solidFill>
-                <a:latin typeface="Calibri"/>
-              </a:rPr>
-              <a:t>Inicio 5:10 pm</a:t>
-            </a:r>
-          </a:p>
-        </p:txBody>
-      </p:sp>
-      <p:sp>
-        <p:nvSpPr>
-          <p:cNvPr id="6" name="TextBox 5"/>
           <p:cNvSpPr txBox="1"/>
           <p:nvPr/>
         </p:nvSpPr>
@@ -9751,41 +9314,6 @@
         </p:nvSpPr>
         <p:spPr>
           <a:xfrm>
-            <a:off x="2194560" y="6446520"/>
-            <a:ext cx="5943600" cy="274320"/>
-          </a:xfrm>
-          <a:prstGeom prst="rect">
-            <a:avLst/>
-          </a:prstGeom>
-          <a:noFill/>
-        </p:spPr>
-        <p:txBody>
-          <a:bodyPr wrap="square" anchor="t" lIns="0" rIns="0" tIns="0" bIns="0">
-            <a:spAutoFit/>
-          </a:bodyPr>
-          <a:lstStyle/>
-          <a:p>
-            <a:pPr algn="l"/>
-            <a:r>
-              <a:rPr sz="1000" b="1" i="0">
-                <a:solidFill>
-                  <a:srgbClr val="8F989D"/>
-                </a:solidFill>
-                <a:latin typeface="Calibri"/>
-              </a:rPr>
-              <a:t>Inicio 5:10 pm</a:t>
-            </a:r>
-          </a:p>
-        </p:txBody>
-      </p:sp>
-      <p:sp>
-        <p:nvSpPr>
-          <p:cNvPr id="6" name="TextBox 5"/>
-          <p:cNvSpPr txBox="1"/>
-          <p:nvPr/>
-        </p:nvSpPr>
-        <p:spPr>
-          <a:xfrm>
             <a:off x="11094415" y="6446520"/>
             <a:ext cx="548640" cy="274320"/>
           </a:xfrm>
@@ -9815,7 +9343,7 @@
       </p:sp>
       <p:sp>
         <p:nvSpPr>
-          <p:cNvPr id="7" name="TextBox 6"/>
+          <p:cNvPr id="6" name="TextBox 5"/>
           <p:cNvSpPr txBox="1"/>
           <p:nvPr/>
         </p:nvSpPr>
@@ -10644,41 +10172,6 @@
         </p:nvSpPr>
         <p:spPr>
           <a:xfrm>
-            <a:off x="2194560" y="6446520"/>
-            <a:ext cx="5943600" cy="274320"/>
-          </a:xfrm>
-          <a:prstGeom prst="rect">
-            <a:avLst/>
-          </a:prstGeom>
-          <a:noFill/>
-        </p:spPr>
-        <p:txBody>
-          <a:bodyPr wrap="square" anchor="t" lIns="0" rIns="0" tIns="0" bIns="0">
-            <a:spAutoFit/>
-          </a:bodyPr>
-          <a:lstStyle/>
-          <a:p>
-            <a:pPr algn="l"/>
-            <a:r>
-              <a:rPr sz="1000" b="1" i="0">
-                <a:solidFill>
-                  <a:srgbClr val="8F989D"/>
-                </a:solidFill>
-                <a:latin typeface="Calibri"/>
-              </a:rPr>
-              <a:t>Inicio 5:10 pm</a:t>
-            </a:r>
-          </a:p>
-        </p:txBody>
-      </p:sp>
-      <p:sp>
-        <p:nvSpPr>
-          <p:cNvPr id="6" name="TextBox 5"/>
-          <p:cNvSpPr txBox="1"/>
-          <p:nvPr/>
-        </p:nvSpPr>
-        <p:spPr>
-          <a:xfrm>
             <a:off x="11094415" y="6446520"/>
             <a:ext cx="548640" cy="274320"/>
           </a:xfrm>
@@ -10919,7 +10412,7 @@
                           </a:solidFill>
                           <a:latin typeface="Calibri"/>
                         </a:rPr>
-                        <a:t>Conozco la ruta de verificación en CDigital</a:t>
+                        <a:t>Sé cómo opera la revisión de similitud del aula</a:t>
                       </a:r>
                     </a:p>
                   </a:txBody>
@@ -10942,7 +10435,7 @@
                           </a:solidFill>
                           <a:latin typeface="Calibri"/>
                         </a:rPr>
-                        <a:t>La tengo anotada en el documento</a:t>
+                        <a:t>Lo anoté según lo que confirmó el Docente</a:t>
                       </a:r>
                     </a:p>
                   </a:txBody>
@@ -10988,41 +10481,6 @@
         </p:nvSpPr>
         <p:spPr>
           <a:xfrm>
-            <a:off x="2194560" y="6446520"/>
-            <a:ext cx="5943600" cy="274320"/>
-          </a:xfrm>
-          <a:prstGeom prst="rect">
-            <a:avLst/>
-          </a:prstGeom>
-          <a:noFill/>
-        </p:spPr>
-        <p:txBody>
-          <a:bodyPr wrap="square" anchor="t" lIns="0" rIns="0" tIns="0" bIns="0">
-            <a:spAutoFit/>
-          </a:bodyPr>
-          <a:lstStyle/>
-          <a:p>
-            <a:pPr algn="l"/>
-            <a:r>
-              <a:rPr sz="1000" b="1" i="0">
-                <a:solidFill>
-                  <a:srgbClr val="8F989D"/>
-                </a:solidFill>
-                <a:latin typeface="Calibri"/>
-              </a:rPr>
-              <a:t>Inicio 5:10 pm</a:t>
-            </a:r>
-          </a:p>
-        </p:txBody>
-      </p:sp>
-      <p:sp>
-        <p:nvSpPr>
-          <p:cNvPr id="6" name="TextBox 5"/>
-          <p:cNvSpPr txBox="1"/>
-          <p:nvPr/>
-        </p:nvSpPr>
-        <p:spPr>
-          <a:xfrm>
             <a:off x="11094415" y="6446520"/>
             <a:ext cx="548640" cy="274320"/>
           </a:xfrm>
@@ -11232,7 +10690,7 @@
                 </a:solidFill>
                 <a:latin typeface="Calibri"/>
               </a:rPr>
-              <a:t>Corra la verificación de similitud</a:t>
+              <a:t>Su entrega pasa por la revisión de similitud institucional del aula</a:t>
             </a:r>
             <a:r>
               <a:rPr sz="1600" b="0" i="0">
@@ -11241,25 +10699,7 @@
                 </a:solidFill>
                 <a:latin typeface="Calibri"/>
               </a:rPr>
-              <a:t> por la ruta institucional del curso y </a:t>
-            </a:r>
-            <a:r>
-              <a:rPr sz="1600" b="1" i="0">
-                <a:solidFill>
-                  <a:srgbClr val="2B2B2B"/>
-                </a:solidFill>
-                <a:latin typeface="Calibri"/>
-              </a:rPr>
-              <a:t>guarde la constancia</a:t>
-            </a:r>
-            <a:r>
-              <a:rPr sz="1600" b="0" i="0">
-                <a:solidFill>
-                  <a:srgbClr val="2B2B2B"/>
-                </a:solidFill>
-                <a:latin typeface="Calibri"/>
-              </a:rPr>
-              <a:t>: la va a necesitar para el paquete del repositorio.</a:t>
+              <a:t>; si el curso exige alguna constancia, el Docente indica cómo obtenerla para el paquete del repositorio.</a:t>
             </a:r>
           </a:p>
           <a:p>
@@ -11284,7 +10724,7 @@
                 </a:solidFill>
                 <a:latin typeface="Calibri"/>
               </a:rPr>
-              <a:t>Revise el informe completo, no solo el porcentaje</a:t>
+              <a:t>Si le comparten el informe, mírelo completo, no solo el porcentaje</a:t>
             </a:r>
             <a:r>
               <a:rPr sz="1600" b="0" i="0">
@@ -11293,7 +10733,7 @@
                 </a:solidFill>
                 <a:latin typeface="Calibri"/>
               </a:rPr>
-              <a:t>: entre a ver </a:t>
+              <a:t>: revise </a:t>
             </a:r>
             <a:r>
               <a:rPr sz="1600" b="1" i="0">
@@ -11311,7 +10751,7 @@
                 </a:solidFill>
                 <a:latin typeface="Calibri"/>
               </a:rPr>
-              <a:t> quedó marcado y decida qué reescribir y qué citar.</a:t>
+              <a:t> quedó marcado y por qué, y decida qué reescribir y qué citar.</a:t>
             </a:r>
           </a:p>
           <a:p>
@@ -11480,41 +10920,6 @@
       <p:sp>
         <p:nvSpPr>
           <p:cNvPr id="5" name="TextBox 4"/>
-          <p:cNvSpPr txBox="1"/>
-          <p:nvPr/>
-        </p:nvSpPr>
-        <p:spPr>
-          <a:xfrm>
-            <a:off x="2194560" y="6446520"/>
-            <a:ext cx="5943600" cy="274320"/>
-          </a:xfrm>
-          <a:prstGeom prst="rect">
-            <a:avLst/>
-          </a:prstGeom>
-          <a:noFill/>
-        </p:spPr>
-        <p:txBody>
-          <a:bodyPr wrap="square" anchor="t" lIns="0" rIns="0" tIns="0" bIns="0">
-            <a:spAutoFit/>
-          </a:bodyPr>
-          <a:lstStyle/>
-          <a:p>
-            <a:pPr algn="l"/>
-            <a:r>
-              <a:rPr sz="1000" b="1" i="0">
-                <a:solidFill>
-                  <a:srgbClr val="8F989D"/>
-                </a:solidFill>
-                <a:latin typeface="Calibri"/>
-              </a:rPr>
-              <a:t>Inicio 5:10 pm</a:t>
-            </a:r>
-          </a:p>
-        </p:txBody>
-      </p:sp>
-      <p:sp>
-        <p:nvSpPr>
-          <p:cNvPr id="6" name="TextBox 5"/>
           <p:cNvSpPr txBox="1"/>
           <p:nvPr/>
         </p:nvSpPr>
@@ -11766,41 +11171,6 @@
           </a:p>
         </p:txBody>
       </p:sp>
-      <p:sp>
-        <p:nvSpPr>
-          <p:cNvPr id="7" name="TextBox 6"/>
-          <p:cNvSpPr txBox="1"/>
-          <p:nvPr/>
-        </p:nvSpPr>
-        <p:spPr>
-          <a:xfrm>
-            <a:off x="2194560" y="6446520"/>
-            <a:ext cx="5943600" cy="274320"/>
-          </a:xfrm>
-          <a:prstGeom prst="rect">
-            <a:avLst/>
-          </a:prstGeom>
-          <a:noFill/>
-        </p:spPr>
-        <p:txBody>
-          <a:bodyPr wrap="square" anchor="t" lIns="0" rIns="0" tIns="0" bIns="0">
-            <a:spAutoFit/>
-          </a:bodyPr>
-          <a:lstStyle/>
-          <a:p>
-            <a:pPr algn="l"/>
-            <a:r>
-              <a:rPr sz="1000" b="1" i="0">
-                <a:solidFill>
-                  <a:srgbClr val="8F989D"/>
-                </a:solidFill>
-                <a:latin typeface="Calibri"/>
-              </a:rPr>
-              <a:t>Inicio 5:10 pm</a:t>
-            </a:r>
-          </a:p>
-        </p:txBody>
-      </p:sp>
     </p:spTree>
   </p:cSld>
   <p:clrMapOvr>
@@ -12256,41 +11626,6 @@
       <p:sp>
         <p:nvSpPr>
           <p:cNvPr id="5" name="TextBox 4"/>
-          <p:cNvSpPr txBox="1"/>
-          <p:nvPr/>
-        </p:nvSpPr>
-        <p:spPr>
-          <a:xfrm>
-            <a:off x="2194560" y="6446520"/>
-            <a:ext cx="5943600" cy="274320"/>
-          </a:xfrm>
-          <a:prstGeom prst="rect">
-            <a:avLst/>
-          </a:prstGeom>
-          <a:noFill/>
-        </p:spPr>
-        <p:txBody>
-          <a:bodyPr wrap="square" anchor="t" lIns="0" rIns="0" tIns="0" bIns="0">
-            <a:spAutoFit/>
-          </a:bodyPr>
-          <a:lstStyle/>
-          <a:p>
-            <a:pPr algn="l"/>
-            <a:r>
-              <a:rPr sz="1000" b="1" i="0">
-                <a:solidFill>
-                  <a:srgbClr val="8F989D"/>
-                </a:solidFill>
-                <a:latin typeface="Calibri"/>
-              </a:rPr>
-              <a:t>Inicio 5:10 pm</a:t>
-            </a:r>
-          </a:p>
-        </p:txBody>
-      </p:sp>
-      <p:sp>
-        <p:nvSpPr>
-          <p:cNvPr id="6" name="TextBox 5"/>
           <p:cNvSpPr txBox="1"/>
           <p:nvPr/>
         </p:nvSpPr>
@@ -13201,41 +12536,6 @@
         </p:nvSpPr>
         <p:spPr>
           <a:xfrm>
-            <a:off x="2194560" y="6446520"/>
-            <a:ext cx="5943600" cy="274320"/>
-          </a:xfrm>
-          <a:prstGeom prst="rect">
-            <a:avLst/>
-          </a:prstGeom>
-          <a:noFill/>
-        </p:spPr>
-        <p:txBody>
-          <a:bodyPr wrap="square" anchor="t" lIns="0" rIns="0" tIns="0" bIns="0">
-            <a:spAutoFit/>
-          </a:bodyPr>
-          <a:lstStyle/>
-          <a:p>
-            <a:pPr algn="l"/>
-            <a:r>
-              <a:rPr sz="1000" b="1" i="0">
-                <a:solidFill>
-                  <a:srgbClr val="8F989D"/>
-                </a:solidFill>
-                <a:latin typeface="Calibri"/>
-              </a:rPr>
-              <a:t>Inicio 5:10 pm</a:t>
-            </a:r>
-          </a:p>
-        </p:txBody>
-      </p:sp>
-      <p:sp>
-        <p:nvSpPr>
-          <p:cNvPr id="7" name="TextBox 6"/>
-          <p:cNvSpPr txBox="1"/>
-          <p:nvPr/>
-        </p:nvSpPr>
-        <p:spPr>
-          <a:xfrm>
             <a:off x="11094415" y="6446520"/>
             <a:ext cx="548640" cy="274320"/>
           </a:xfrm>
@@ -13687,41 +12987,6 @@
         </p:nvSpPr>
         <p:spPr>
           <a:xfrm>
-            <a:off x="2194560" y="6446520"/>
-            <a:ext cx="5943600" cy="274320"/>
-          </a:xfrm>
-          <a:prstGeom prst="rect">
-            <a:avLst/>
-          </a:prstGeom>
-          <a:noFill/>
-        </p:spPr>
-        <p:txBody>
-          <a:bodyPr wrap="square" anchor="t" lIns="0" rIns="0" tIns="0" bIns="0">
-            <a:spAutoFit/>
-          </a:bodyPr>
-          <a:lstStyle/>
-          <a:p>
-            <a:pPr algn="l"/>
-            <a:r>
-              <a:rPr sz="1000" b="1" i="0">
-                <a:solidFill>
-                  <a:srgbClr val="8F989D"/>
-                </a:solidFill>
-                <a:latin typeface="Calibri"/>
-              </a:rPr>
-              <a:t>Inicio 5:10 pm</a:t>
-            </a:r>
-          </a:p>
-        </p:txBody>
-      </p:sp>
-      <p:sp>
-        <p:nvSpPr>
-          <p:cNvPr id="6" name="TextBox 5"/>
-          <p:cNvSpPr txBox="1"/>
-          <p:nvPr/>
-        </p:nvSpPr>
-        <p:spPr>
-          <a:xfrm>
             <a:off x="11094415" y="6446520"/>
             <a:ext cx="548640" cy="274320"/>
           </a:xfrm>
@@ -13953,41 +13218,6 @@
         </p:nvSpPr>
         <p:spPr>
           <a:xfrm>
-            <a:off x="2194560" y="6446520"/>
-            <a:ext cx="5943600" cy="274320"/>
-          </a:xfrm>
-          <a:prstGeom prst="rect">
-            <a:avLst/>
-          </a:prstGeom>
-          <a:noFill/>
-        </p:spPr>
-        <p:txBody>
-          <a:bodyPr wrap="square" anchor="t" lIns="0" rIns="0" tIns="0" bIns="0">
-            <a:spAutoFit/>
-          </a:bodyPr>
-          <a:lstStyle/>
-          <a:p>
-            <a:pPr algn="l"/>
-            <a:r>
-              <a:rPr sz="1000" b="1" i="0">
-                <a:solidFill>
-                  <a:srgbClr val="8F989D"/>
-                </a:solidFill>
-                <a:latin typeface="Calibri"/>
-              </a:rPr>
-              <a:t>Inicio 5:10 pm</a:t>
-            </a:r>
-          </a:p>
-        </p:txBody>
-      </p:sp>
-      <p:sp>
-        <p:nvSpPr>
-          <p:cNvPr id="6" name="TextBox 5"/>
-          <p:cNvSpPr txBox="1"/>
-          <p:nvPr/>
-        </p:nvSpPr>
-        <p:spPr>
-          <a:xfrm>
             <a:off x="11094415" y="6446520"/>
             <a:ext cx="548640" cy="274320"/>
           </a:xfrm>
@@ -14628,41 +13858,6 @@
         </p:nvSpPr>
         <p:spPr>
           <a:xfrm>
-            <a:off x="2194560" y="6446520"/>
-            <a:ext cx="5943600" cy="274320"/>
-          </a:xfrm>
-          <a:prstGeom prst="rect">
-            <a:avLst/>
-          </a:prstGeom>
-          <a:noFill/>
-        </p:spPr>
-        <p:txBody>
-          <a:bodyPr wrap="square" anchor="t" lIns="0" rIns="0" tIns="0" bIns="0">
-            <a:spAutoFit/>
-          </a:bodyPr>
-          <a:lstStyle/>
-          <a:p>
-            <a:pPr algn="l"/>
-            <a:r>
-              <a:rPr sz="1000" b="1" i="0">
-                <a:solidFill>
-                  <a:srgbClr val="8F989D"/>
-                </a:solidFill>
-                <a:latin typeface="Calibri"/>
-              </a:rPr>
-              <a:t>Inicio 5:10 pm</a:t>
-            </a:r>
-          </a:p>
-        </p:txBody>
-      </p:sp>
-      <p:sp>
-        <p:nvSpPr>
-          <p:cNvPr id="6" name="TextBox 5"/>
-          <p:cNvSpPr txBox="1"/>
-          <p:nvPr/>
-        </p:nvSpPr>
-        <p:spPr>
-          <a:xfrm>
             <a:off x="11094415" y="6446520"/>
             <a:ext cx="548640" cy="274320"/>
           </a:xfrm>
@@ -14860,41 +14055,6 @@
         </p:nvSpPr>
         <p:spPr>
           <a:xfrm>
-            <a:off x="2194560" y="6446520"/>
-            <a:ext cx="5943600" cy="274320"/>
-          </a:xfrm>
-          <a:prstGeom prst="rect">
-            <a:avLst/>
-          </a:prstGeom>
-          <a:noFill/>
-        </p:spPr>
-        <p:txBody>
-          <a:bodyPr wrap="square" anchor="t" lIns="0" rIns="0" tIns="0" bIns="0">
-            <a:spAutoFit/>
-          </a:bodyPr>
-          <a:lstStyle/>
-          <a:p>
-            <a:pPr algn="l"/>
-            <a:r>
-              <a:rPr sz="1000" b="1" i="0">
-                <a:solidFill>
-                  <a:srgbClr val="8F989D"/>
-                </a:solidFill>
-                <a:latin typeface="Calibri"/>
-              </a:rPr>
-              <a:t>Inicio 5:10 pm</a:t>
-            </a:r>
-          </a:p>
-        </p:txBody>
-      </p:sp>
-      <p:sp>
-        <p:nvSpPr>
-          <p:cNvPr id="6" name="TextBox 5"/>
-          <p:cNvSpPr txBox="1"/>
-          <p:nvPr/>
-        </p:nvSpPr>
-        <p:spPr>
-          <a:xfrm>
             <a:off x="11094415" y="6446520"/>
             <a:ext cx="548640" cy="274320"/>
           </a:xfrm>
@@ -15377,41 +14537,6 @@
       <p:sp>
         <p:nvSpPr>
           <p:cNvPr id="5" name="TextBox 4"/>
-          <p:cNvSpPr txBox="1"/>
-          <p:nvPr/>
-        </p:nvSpPr>
-        <p:spPr>
-          <a:xfrm>
-            <a:off x="2194560" y="6446520"/>
-            <a:ext cx="5943600" cy="274320"/>
-          </a:xfrm>
-          <a:prstGeom prst="rect">
-            <a:avLst/>
-          </a:prstGeom>
-          <a:noFill/>
-        </p:spPr>
-        <p:txBody>
-          <a:bodyPr wrap="square" anchor="t" lIns="0" rIns="0" tIns="0" bIns="0">
-            <a:spAutoFit/>
-          </a:bodyPr>
-          <a:lstStyle/>
-          <a:p>
-            <a:pPr algn="l"/>
-            <a:r>
-              <a:rPr sz="1000" b="1" i="0">
-                <a:solidFill>
-                  <a:srgbClr val="8F989D"/>
-                </a:solidFill>
-                <a:latin typeface="Calibri"/>
-              </a:rPr>
-              <a:t>Inicio 5:10 pm</a:t>
-            </a:r>
-          </a:p>
-        </p:txBody>
-      </p:sp>
-      <p:sp>
-        <p:nvSpPr>
-          <p:cNvPr id="6" name="TextBox 5"/>
           <p:cNvSpPr txBox="1"/>
           <p:nvPr/>
         </p:nvSpPr>

--- a/Pregrado/Trabajo de grado 3/Clases/Sesion 11 - Póster · evidencias · verificación antiplagio/Presentacion.pptx
+++ b/Pregrado/Trabajo de grado 3/Clases/Sesion 11 - Póster · evidencias · verificación antiplagio/Presentacion.pptx
@@ -30,6 +30,7 @@
     <p:sldId id="278" r:id="rId29"/>
     <p:sldId id="279" r:id="rId30"/>
     <p:sldId id="280" r:id="rId31"/>
+    <p:sldId id="281" r:id="rId32"/>
   </p:sldIdLst>
   <p:sldSz cx="12191695" cy="6858000" type="screen4x3"/>
   <p:notesSz cx="6858000" cy="9144000"/>
@@ -6830,7 +6831,7 @@
                 </a:solidFill>
                 <a:latin typeface="Calibri"/>
               </a:rPr>
-              <a:t>"Pego el artículo completo en el póster, así no falta nada."</a:t>
+              <a:t>"Pego el documento completo en el póster, así no falta nada."</a:t>
             </a:r>
           </a:p>
         </p:txBody>
@@ -6942,7 +6943,7 @@
                 </a:solidFill>
                 <a:latin typeface="Calibri"/>
               </a:rPr>
-              <a:t>, no el artículo en miniatura. Si no se lee a un metro, sobra texto. Lo que falte, lo dice usted en vivo.</a:t>
+              <a:t>, no el documento en miniatura. Si no se lee a un metro, sobra texto. Lo que falte, lo dice usted en vivo.</a:t>
             </a:r>
           </a:p>
         </p:txBody>
@@ -8242,7 +8243,7 @@
                 </a:solidFill>
                 <a:latin typeface="Calibri"/>
               </a:rPr>
-              <a:t> es el artículo en miniatura: es una </a:t>
+              <a:t> es el documento en miniatura: es una </a:t>
             </a:r>
             <a:r>
               <a:rPr sz="1600" b="1" i="0">
@@ -8712,7 +8713,7 @@
                 </a:solidFill>
                 <a:latin typeface="Calibri"/>
               </a:rPr>
-              <a:t>TALLER — Póster, anexos y revisión de similitud (20 minutos)</a:t>
+              <a:t>TALLER · Póster, anexos y revisión de similitud</a:t>
             </a:r>
           </a:p>
         </p:txBody>
@@ -8725,8 +8726,8 @@
         </p:nvSpPr>
         <p:spPr>
           <a:xfrm>
-            <a:off x="640080" y="1691639"/>
-            <a:ext cx="10911535" cy="4617720"/>
+            <a:off x="640080" y="1280160"/>
+            <a:ext cx="10911535" cy="411480"/>
           </a:xfrm>
           <a:prstGeom prst="rect">
             <a:avLst/>
@@ -8739,6 +8740,41 @@
           </a:bodyPr>
           <a:lstStyle/>
           <a:p>
+            <a:pPr algn="ctr"/>
+            <a:r>
+              <a:rPr sz="1500" b="0" i="0">
+                <a:solidFill>
+                  <a:srgbClr val="2B2B2B"/>
+                </a:solidFill>
+                <a:latin typeface="Calibri"/>
+              </a:rPr>
+              <a:t>Individual · el Docente pasa haciendo la «prueba del metro» a los pósteres</a:t>
+            </a:r>
+          </a:p>
+        </p:txBody>
+      </p:sp>
+      <p:sp>
+        <p:nvSpPr>
+          <p:cNvPr id="5" name="TextBox 4"/>
+          <p:cNvSpPr txBox="1"/>
+          <p:nvPr/>
+        </p:nvSpPr>
+        <p:spPr>
+          <a:xfrm>
+            <a:off x="640080" y="2011679"/>
+            <a:ext cx="10911535" cy="4297680"/>
+          </a:xfrm>
+          <a:prstGeom prst="rect">
+            <a:avLst/>
+          </a:prstGeom>
+          <a:noFill/>
+        </p:spPr>
+        <p:txBody>
+          <a:bodyPr wrap="square" anchor="t" lIns="0" rIns="0" tIns="0" bIns="0">
+            <a:spAutoFit/>
+          </a:bodyPr>
+          <a:lstStyle/>
+          <a:p>
             <a:pPr>
               <a:spcAft>
                 <a:spcPts val="1000"/>
@@ -8760,7 +8796,7 @@
                 </a:solidFill>
                 <a:latin typeface="Calibri"/>
               </a:rPr>
-              <a:t>Consigna literal.</a:t>
+              <a:t>Al final tiene:</a:t>
             </a:r>
             <a:r>
               <a:rPr sz="1600" b="0" i="0">
@@ -8769,197 +8805,7 @@
                 </a:solidFill>
                 <a:latin typeface="Calibri"/>
               </a:rPr>
-              <a:t> Entregue </a:t>
-            </a:r>
-            <a:r>
-              <a:rPr sz="1600" b="1" i="0">
-                <a:solidFill>
-                  <a:srgbClr val="2B2B2B"/>
-                </a:solidFill>
-                <a:latin typeface="Calibri"/>
-              </a:rPr>
-              <a:t>S11_PosterEvidencias_Apellido</a:t>
-            </a:r>
-            <a:r>
-              <a:rPr sz="1600" b="0" i="0">
-                <a:solidFill>
-                  <a:srgbClr val="2B2B2B"/>
-                </a:solidFill>
-                <a:latin typeface="Calibri"/>
-              </a:rPr>
-              <a:t> con tres productos:</a:t>
-            </a:r>
-          </a:p>
-          <a:p>
-            <a:pPr lvl="1">
-              <a:spcAft>
-                <a:spcPts val="600"/>
-              </a:spcAft>
-            </a:pPr>
-            <a:r>
-              <a:rPr sz="1500" b="0" i="0">
-                <a:solidFill>
-                  <a:srgbClr val="2B2B2B"/>
-                </a:solidFill>
-                <a:latin typeface="Calibri"/>
-              </a:rPr>
-              <a:t>●   </a:t>
-            </a:r>
-            <a:r>
-              <a:rPr sz="1500" b="1" i="0">
-                <a:solidFill>
-                  <a:srgbClr val="2B2B2B"/>
-                </a:solidFill>
-                <a:latin typeface="Calibri"/>
-              </a:rPr>
-              <a:t>(1) Póster de una página</a:t>
-            </a:r>
-            <a:r>
-              <a:rPr sz="1500" b="0" i="0">
-                <a:solidFill>
-                  <a:srgbClr val="2B2B2B"/>
-                </a:solidFill>
-                <a:latin typeface="Calibri"/>
-              </a:rPr>
-              <a:t> en Canva free o Google Slides, con los bloques problema · método · hallazgo · conclusión, un gráfico en el centro y máximo 3 referencias al pie. Exportado en PDF.</a:t>
-            </a:r>
-          </a:p>
-          <a:p>
-            <a:pPr lvl="1">
-              <a:spcAft>
-                <a:spcPts val="600"/>
-              </a:spcAft>
-            </a:pPr>
-            <a:r>
-              <a:rPr sz="1500" b="0" i="0">
-                <a:solidFill>
-                  <a:srgbClr val="2B2B2B"/>
-                </a:solidFill>
-                <a:latin typeface="Calibri"/>
-              </a:rPr>
-              <a:t>●   </a:t>
-            </a:r>
-            <a:r>
-              <a:rPr sz="1500" b="1" i="0">
-                <a:solidFill>
-                  <a:srgbClr val="2B2B2B"/>
-                </a:solidFill>
-                <a:latin typeface="Calibri"/>
-              </a:rPr>
-              <a:t>(2) Lista de anexos</a:t>
-            </a:r>
-            <a:r>
-              <a:rPr sz="1500" b="0" i="0">
-                <a:solidFill>
-                  <a:srgbClr val="2B2B2B"/>
-                </a:solidFill>
-                <a:latin typeface="Calibri"/>
-              </a:rPr>
-              <a:t> en tabla, con las columnas anexo · contenido · dónde se referencia · estado. Mínimo tres anexos reales de su proyecto.</a:t>
-            </a:r>
-          </a:p>
-          <a:p>
-            <a:pPr lvl="1">
-              <a:spcAft>
-                <a:spcPts val="600"/>
-              </a:spcAft>
-            </a:pPr>
-            <a:r>
-              <a:rPr sz="1500" b="0" i="0">
-                <a:solidFill>
-                  <a:srgbClr val="2B2B2B"/>
-                </a:solidFill>
-                <a:latin typeface="Calibri"/>
-              </a:rPr>
-              <a:t>●   </a:t>
-            </a:r>
-            <a:r>
-              <a:rPr sz="1500" b="1" i="0">
-                <a:solidFill>
-                  <a:srgbClr val="2B2B2B"/>
-                </a:solidFill>
-                <a:latin typeface="Calibri"/>
-              </a:rPr>
-              <a:t>(3) Un párrafo reescrito:</a:t>
-            </a:r>
-            <a:r>
-              <a:rPr sz="1500" b="0" i="0">
-                <a:solidFill>
-                  <a:srgbClr val="2B2B2B"/>
-                </a:solidFill>
-                <a:latin typeface="Calibri"/>
-              </a:rPr>
-              <a:t> identifique en su artículo el párrafo con mayor riesgo de similitud, transcríbalo, y debajo escriba su </a:t>
-            </a:r>
-            <a:r>
-              <a:rPr sz="1500" b="1" i="0">
-                <a:solidFill>
-                  <a:srgbClr val="2B2B2B"/>
-                </a:solidFill>
-                <a:latin typeface="Calibri"/>
-              </a:rPr>
-              <a:t>paráfrasis real con la cita</a:t>
-            </a:r>
-            <a:r>
-              <a:rPr sz="1500" b="0" i="0">
-                <a:solidFill>
-                  <a:srgbClr val="2B2B2B"/>
-                </a:solidFill>
-                <a:latin typeface="Calibri"/>
-              </a:rPr>
-              <a:t> correspondiente.</a:t>
-            </a:r>
-          </a:p>
-          <a:p>
-            <a:pPr lvl="1">
-              <a:spcAft>
-                <a:spcPts val="600"/>
-              </a:spcAft>
-            </a:pPr>
-            <a:r>
-              <a:rPr sz="1500" b="0" i="0">
-                <a:solidFill>
-                  <a:srgbClr val="2B2B2B"/>
-                </a:solidFill>
-                <a:latin typeface="Calibri"/>
-              </a:rPr>
-              <a:t>●   </a:t>
-            </a:r>
-            <a:r>
-              <a:rPr sz="1500" b="1" i="0">
-                <a:solidFill>
-                  <a:srgbClr val="2B2B2B"/>
-                </a:solidFill>
-                <a:latin typeface="Calibri"/>
-              </a:rPr>
-              <a:t>(4)</a:t>
-            </a:r>
-            <a:r>
-              <a:rPr sz="1500" b="0" i="0">
-                <a:solidFill>
-                  <a:srgbClr val="2B2B2B"/>
-                </a:solidFill>
-                <a:latin typeface="Calibri"/>
-              </a:rPr>
-              <a:t> Deje por escrito </a:t>
-            </a:r>
-            <a:r>
-              <a:rPr sz="1500" b="1" i="0">
-                <a:solidFill>
-                  <a:srgbClr val="2B2B2B"/>
-                </a:solidFill>
-                <a:latin typeface="Calibri"/>
-              </a:rPr>
-              <a:t>cómo opera la revisión de similitud en el aula</a:t>
-            </a:r>
-            <a:r>
-              <a:rPr sz="1500" b="0" i="0">
-                <a:solidFill>
-                  <a:srgbClr val="2B2B2B"/>
-                </a:solidFill>
-                <a:latin typeface="Calibri"/>
-              </a:rPr>
-              <a:t> según lo que confirmó el Docente: cuándo ocurre y si el curso pide adjuntar algún informe.</a:t>
+              <a:t> el póster de una página, la lista de anexos y un párrafo reescrito con su cita.</a:t>
             </a:r>
           </a:p>
           <a:p>
@@ -8984,7 +8830,7 @@
                 </a:solidFill>
                 <a:latin typeface="Calibri"/>
               </a:rPr>
-              <a:t>Tiempo:</a:t>
+              <a:t>Paso 1</a:t>
             </a:r>
             <a:r>
               <a:rPr sz="1600" b="0" i="0">
@@ -8993,14 +8839,258 @@
                 </a:solidFill>
                 <a:latin typeface="Calibri"/>
               </a:rPr>
-              <a:t> 20 minutos. El Docente pasa haciendo la "prueba del metro" a los pósteres.</a:t>
-            </a:r>
-          </a:p>
-        </p:txBody>
-      </p:sp>
-      <p:sp>
-        <p:nvSpPr>
-          <p:cNvPr id="5" name="TextBox 4"/>
+              <a:t> · </a:t>
+            </a:r>
+            <a:r>
+              <a:rPr sz="1600" b="1" i="0">
+                <a:solidFill>
+                  <a:srgbClr val="2B2B2B"/>
+                </a:solidFill>
+                <a:latin typeface="Calibri"/>
+              </a:rPr>
+              <a:t>Póster de una página</a:t>
+            </a:r>
+            <a:r>
+              <a:rPr sz="1600" b="0" i="0">
+                <a:solidFill>
+                  <a:srgbClr val="2B2B2B"/>
+                </a:solidFill>
+                <a:latin typeface="Calibri"/>
+              </a:rPr>
+              <a:t> en Canva free o Google Slides, con los bloques problema · método · hallazgo · conclusión, un gráfico al centro y máximo 3 referencias al pie. Exportado en PDF.</a:t>
+            </a:r>
+          </a:p>
+          <a:p>
+            <a:pPr>
+              <a:spcAft>
+                <a:spcPts val="1000"/>
+              </a:spcAft>
+            </a:pPr>
+            <a:r>
+              <a:rPr sz="1600" b="0" i="0">
+                <a:solidFill>
+                  <a:srgbClr val="2B2B2B"/>
+                </a:solidFill>
+                <a:latin typeface="Calibri"/>
+              </a:rPr>
+              <a:t>–   </a:t>
+            </a:r>
+            <a:r>
+              <a:rPr sz="1600" b="1" i="0">
+                <a:solidFill>
+                  <a:srgbClr val="2B2B2B"/>
+                </a:solidFill>
+                <a:latin typeface="Calibri"/>
+              </a:rPr>
+              <a:t>Paso 2</a:t>
+            </a:r>
+            <a:r>
+              <a:rPr sz="1600" b="0" i="0">
+                <a:solidFill>
+                  <a:srgbClr val="2B2B2B"/>
+                </a:solidFill>
+                <a:latin typeface="Calibri"/>
+              </a:rPr>
+              <a:t> · </a:t>
+            </a:r>
+            <a:r>
+              <a:rPr sz="1600" b="1" i="0">
+                <a:solidFill>
+                  <a:srgbClr val="2B2B2B"/>
+                </a:solidFill>
+                <a:latin typeface="Calibri"/>
+              </a:rPr>
+              <a:t>Lista de anexos</a:t>
+            </a:r>
+            <a:r>
+              <a:rPr sz="1600" b="0" i="0">
+                <a:solidFill>
+                  <a:srgbClr val="2B2B2B"/>
+                </a:solidFill>
+                <a:latin typeface="Calibri"/>
+              </a:rPr>
+              <a:t> en tabla —anexo · contenido · dónde se referencia · estado—, con mínimo tres anexos reales de su proyecto.</a:t>
+            </a:r>
+          </a:p>
+          <a:p>
+            <a:pPr>
+              <a:spcAft>
+                <a:spcPts val="1000"/>
+              </a:spcAft>
+            </a:pPr>
+            <a:r>
+              <a:rPr sz="1600" b="0" i="0">
+                <a:solidFill>
+                  <a:srgbClr val="2B2B2B"/>
+                </a:solidFill>
+                <a:latin typeface="Calibri"/>
+              </a:rPr>
+              <a:t>–   </a:t>
+            </a:r>
+            <a:r>
+              <a:rPr sz="1600" b="1" i="0">
+                <a:solidFill>
+                  <a:srgbClr val="2B2B2B"/>
+                </a:solidFill>
+                <a:latin typeface="Calibri"/>
+              </a:rPr>
+              <a:t>Paso 3</a:t>
+            </a:r>
+            <a:r>
+              <a:rPr sz="1600" b="0" i="0">
+                <a:solidFill>
+                  <a:srgbClr val="2B2B2B"/>
+                </a:solidFill>
+                <a:latin typeface="Calibri"/>
+              </a:rPr>
+              <a:t> · </a:t>
+            </a:r>
+            <a:r>
+              <a:rPr sz="1600" b="1" i="0">
+                <a:solidFill>
+                  <a:srgbClr val="2B2B2B"/>
+                </a:solidFill>
+                <a:latin typeface="Calibri"/>
+              </a:rPr>
+              <a:t>Un párrafo reescrito:</a:t>
+            </a:r>
+            <a:r>
+              <a:rPr sz="1600" b="0" i="0">
+                <a:solidFill>
+                  <a:srgbClr val="2B2B2B"/>
+                </a:solidFill>
+                <a:latin typeface="Calibri"/>
+              </a:rPr>
+              <a:t> identifique el de mayor riesgo de similitud, transcríbalo y debajo escriba su </a:t>
+            </a:r>
+            <a:r>
+              <a:rPr sz="1600" b="1" i="0">
+                <a:solidFill>
+                  <a:srgbClr val="2B2B2B"/>
+                </a:solidFill>
+                <a:latin typeface="Calibri"/>
+              </a:rPr>
+              <a:t>paráfrasis real con la cita</a:t>
+            </a:r>
+            <a:r>
+              <a:rPr sz="1600" b="0" i="0">
+                <a:solidFill>
+                  <a:srgbClr val="2B2B2B"/>
+                </a:solidFill>
+                <a:latin typeface="Calibri"/>
+              </a:rPr>
+              <a:t>.</a:t>
+            </a:r>
+          </a:p>
+          <a:p>
+            <a:pPr>
+              <a:spcAft>
+                <a:spcPts val="1000"/>
+              </a:spcAft>
+            </a:pPr>
+            <a:r>
+              <a:rPr sz="1600" b="0" i="0">
+                <a:solidFill>
+                  <a:srgbClr val="2B2B2B"/>
+                </a:solidFill>
+                <a:latin typeface="Calibri"/>
+              </a:rPr>
+              <a:t>–   </a:t>
+            </a:r>
+            <a:r>
+              <a:rPr sz="1600" b="1" i="0">
+                <a:solidFill>
+                  <a:srgbClr val="2B2B2B"/>
+                </a:solidFill>
+                <a:latin typeface="Calibri"/>
+              </a:rPr>
+              <a:t>Paso 4</a:t>
+            </a:r>
+            <a:r>
+              <a:rPr sz="1600" b="0" i="0">
+                <a:solidFill>
+                  <a:srgbClr val="2B2B2B"/>
+                </a:solidFill>
+                <a:latin typeface="Calibri"/>
+              </a:rPr>
+              <a:t> · Deje por escrito </a:t>
+            </a:r>
+            <a:r>
+              <a:rPr sz="1600" b="1" i="0">
+                <a:solidFill>
+                  <a:srgbClr val="2B2B2B"/>
+                </a:solidFill>
+                <a:latin typeface="Calibri"/>
+              </a:rPr>
+              <a:t>cómo opera la revisión de similitud en el aula</a:t>
+            </a:r>
+            <a:r>
+              <a:rPr sz="1600" b="0" i="0">
+                <a:solidFill>
+                  <a:srgbClr val="2B2B2B"/>
+                </a:solidFill>
+                <a:latin typeface="Calibri"/>
+              </a:rPr>
+              <a:t> según lo que confirmó el Docente: cuándo ocurre y si el curso pide adjuntar algún informe.</a:t>
+            </a:r>
+          </a:p>
+          <a:p>
+            <a:pPr>
+              <a:spcAft>
+                <a:spcPts val="1000"/>
+              </a:spcAft>
+            </a:pPr>
+            <a:r>
+              <a:rPr sz="1600" b="0" i="0">
+                <a:solidFill>
+                  <a:srgbClr val="2B2B2B"/>
+                </a:solidFill>
+                <a:latin typeface="Calibri"/>
+              </a:rPr>
+              <a:t>–   </a:t>
+            </a:r>
+            <a:r>
+              <a:rPr sz="1600" b="1" i="0">
+                <a:solidFill>
+                  <a:srgbClr val="2B2B2B"/>
+                </a:solidFill>
+                <a:latin typeface="Calibri"/>
+              </a:rPr>
+              <a:t>En clase, sin falta:</a:t>
+            </a:r>
+            <a:r>
+              <a:rPr sz="1600" b="0" i="0">
+                <a:solidFill>
+                  <a:srgbClr val="2B2B2B"/>
+                </a:solidFill>
+                <a:latin typeface="Calibri"/>
+              </a:rPr>
+              <a:t> los </a:t>
+            </a:r>
+            <a:r>
+              <a:rPr sz="1600" b="1" i="0">
+                <a:solidFill>
+                  <a:srgbClr val="2B2B2B"/>
+                </a:solidFill>
+                <a:latin typeface="Calibri"/>
+              </a:rPr>
+              <a:t>pasos 1 a 2</a:t>
+            </a:r>
+            <a:r>
+              <a:rPr sz="1600" b="0" i="0">
+                <a:solidFill>
+                  <a:srgbClr val="2B2B2B"/>
+                </a:solidFill>
+                <a:latin typeface="Calibri"/>
+              </a:rPr>
+              <a:t>. Del 3 en adelante puede quedar en trabajo autónomo, pero antes de la próxima sesión.</a:t>
+            </a:r>
+          </a:p>
+        </p:txBody>
+      </p:sp>
+      <p:sp>
+        <p:nvSpPr>
+          <p:cNvPr id="6" name="TextBox 5"/>
           <p:cNvSpPr txBox="1"/>
           <p:nvPr/>
         </p:nvSpPr>
@@ -9133,7 +9223,7 @@
                 </a:solidFill>
                 <a:latin typeface="Calibri"/>
               </a:rPr>
-              <a:t>TALLER — Póster, anexos y revisión de similitud (20 minutos) (cont.)</a:t>
+              <a:t>TALLER · cómo se revisa y dónde se entrega</a:t>
             </a:r>
           </a:p>
         </p:txBody>
@@ -9146,8 +9236,8 @@
         </p:nvSpPr>
         <p:spPr>
           <a:xfrm>
-            <a:off x="640080" y="1691639"/>
-            <a:ext cx="10911535" cy="4617720"/>
+            <a:off x="640080" y="1280160"/>
+            <a:ext cx="10911535" cy="411480"/>
           </a:xfrm>
           <a:prstGeom prst="rect">
             <a:avLst/>
@@ -9160,6 +9250,41 @@
           </a:bodyPr>
           <a:lstStyle/>
           <a:p>
+            <a:pPr algn="ctr"/>
+            <a:r>
+              <a:rPr sz="1500" b="0" i="0">
+                <a:solidFill>
+                  <a:srgbClr val="2B2B2B"/>
+                </a:solidFill>
+                <a:latin typeface="Calibri"/>
+              </a:rPr>
+              <a:t>Póster, anexos y revisión de similitud</a:t>
+            </a:r>
+          </a:p>
+        </p:txBody>
+      </p:sp>
+      <p:sp>
+        <p:nvSpPr>
+          <p:cNvPr id="5" name="TextBox 4"/>
+          <p:cNvSpPr txBox="1"/>
+          <p:nvPr/>
+        </p:nvSpPr>
+        <p:spPr>
+          <a:xfrm>
+            <a:off x="640080" y="2011679"/>
+            <a:ext cx="10911535" cy="4297680"/>
+          </a:xfrm>
+          <a:prstGeom prst="rect">
+            <a:avLst/>
+          </a:prstGeom>
+          <a:noFill/>
+        </p:spPr>
+        <p:txBody>
+          <a:bodyPr wrap="square" anchor="t" lIns="0" rIns="0" tIns="0" bIns="0">
+            <a:spAutoFit/>
+          </a:bodyPr>
+          <a:lstStyle/>
+          <a:p>
             <a:pPr>
               <a:spcAft>
                 <a:spcPts val="1000"/>
@@ -9181,7 +9306,16 @@
                 </a:solidFill>
                 <a:latin typeface="Calibri"/>
               </a:rPr>
-              <a:t>Criterio de éxito (verificable):</a:t>
+              <a:t>Quedó bien si</a:t>
+            </a:r>
+            <a:r>
+              <a:rPr sz="1600" b="0" i="0">
+                <a:solidFill>
+                  <a:srgbClr val="2B2B2B"/>
+                </a:solidFill>
+                <a:latin typeface="Calibri"/>
+              </a:rPr>
+              <a:t> —compruébelo usted antes de cerrar el documento—:</a:t>
             </a:r>
           </a:p>
           <a:p>
@@ -9231,7 +9365,7 @@
                 </a:solidFill>
                 <a:latin typeface="Calibri"/>
               </a:rPr>
-              <a:t>●   Cada anexo tiene rótulo y una sección del cuerpo donde se referencia; </a:t>
+              <a:t>●   Cada anexo tiene rótulo y una sección donde se referencia: </a:t>
             </a:r>
             <a:r>
               <a:rPr sz="1500" b="1" i="0">
@@ -9240,7 +9374,7 @@
                 </a:solidFill>
                 <a:latin typeface="Calibri"/>
               </a:rPr>
-              <a:t>ninguna celda "se referencia en" vacía</a:t>
+              <a:t>ninguna celda «se referencia en» vacía</a:t>
             </a:r>
             <a:r>
               <a:rPr sz="1500" b="0" i="0">
@@ -9304,11 +9438,221 @@
               <a:t>.</a:t>
             </a:r>
           </a:p>
-        </p:txBody>
-      </p:sp>
-      <p:sp>
-        <p:nvSpPr>
-          <p:cNvPr id="5" name="TextBox 4"/>
+          <a:p>
+            <a:pPr>
+              <a:spcAft>
+                <a:spcPts val="1000"/>
+              </a:spcAft>
+            </a:pPr>
+            <a:r>
+              <a:rPr sz="1600" b="0" i="0">
+                <a:solidFill>
+                  <a:srgbClr val="2B2B2B"/>
+                </a:solidFill>
+                <a:latin typeface="Calibri"/>
+              </a:rPr>
+              <a:t>–   </a:t>
+            </a:r>
+            <a:r>
+              <a:rPr sz="1600" b="1" i="0">
+                <a:solidFill>
+                  <a:srgbClr val="2B2B2B"/>
+                </a:solidFill>
+                <a:latin typeface="Calibri"/>
+              </a:rPr>
+              <a:t>Plan B:</a:t>
+            </a:r>
+            <a:r>
+              <a:rPr sz="1600" b="0" i="0">
+                <a:solidFill>
+                  <a:srgbClr val="2B2B2B"/>
+                </a:solidFill>
+                <a:latin typeface="Calibri"/>
+              </a:rPr>
+              <a:t> Control en pareja: muéstrele su póster a un compañero </a:t>
+            </a:r>
+            <a:r>
+              <a:rPr sz="1600" b="1" i="0">
+                <a:solidFill>
+                  <a:srgbClr val="2B2B2B"/>
+                </a:solidFill>
+                <a:latin typeface="Calibri"/>
+              </a:rPr>
+              <a:t>30 segundos</a:t>
+            </a:r>
+            <a:r>
+              <a:rPr sz="1600" b="0" i="0">
+                <a:solidFill>
+                  <a:srgbClr val="2B2B2B"/>
+                </a:solidFill>
+                <a:latin typeface="Calibri"/>
+              </a:rPr>
+              <a:t> y quítelo. Si no puede repetirle su hallazgo principal, el póster todavía no funciona.</a:t>
+            </a:r>
+          </a:p>
+          <a:p>
+            <a:pPr>
+              <a:spcAft>
+                <a:spcPts val="1000"/>
+              </a:spcAft>
+            </a:pPr>
+            <a:r>
+              <a:rPr sz="1600" b="0" i="0">
+                <a:solidFill>
+                  <a:srgbClr val="2B2B2B"/>
+                </a:solidFill>
+                <a:latin typeface="Calibri"/>
+              </a:rPr>
+              <a:t>–   </a:t>
+            </a:r>
+            <a:r>
+              <a:rPr sz="1600" b="1" i="0">
+                <a:solidFill>
+                  <a:srgbClr val="2B2B2B"/>
+                </a:solidFill>
+                <a:latin typeface="Calibri"/>
+              </a:rPr>
+              <a:t>Hoy no se sube nada al aula:</a:t>
+            </a:r>
+            <a:r>
+              <a:rPr sz="1600" b="0" i="0">
+                <a:solidFill>
+                  <a:srgbClr val="2B2B2B"/>
+                </a:solidFill>
+                <a:latin typeface="Calibri"/>
+              </a:rPr>
+              <a:t> guarde `S11_PosterEvidencias_Apellido` (PDF (póster) + Google Doc) en su Drive y tráigalo a la próxima sesión. Es un </a:t>
+            </a:r>
+            <a:r>
+              <a:rPr sz="1600" b="1" i="0">
+                <a:solidFill>
+                  <a:srgbClr val="2B2B2B"/>
+                </a:solidFill>
+                <a:latin typeface="Calibri"/>
+              </a:rPr>
+              <a:t>avance formativo</a:t>
+            </a:r>
+            <a:r>
+              <a:rPr sz="1600" b="0" i="0">
+                <a:solidFill>
+                  <a:srgbClr val="2B2B2B"/>
+                </a:solidFill>
+                <a:latin typeface="Calibri"/>
+              </a:rPr>
+              <a:t>, se revisa en clase.</a:t>
+            </a:r>
+          </a:p>
+          <a:p>
+            <a:pPr>
+              <a:spcAft>
+                <a:spcPts val="1000"/>
+              </a:spcAft>
+            </a:pPr>
+            <a:r>
+              <a:rPr sz="1600" b="0" i="0">
+                <a:solidFill>
+                  <a:srgbClr val="2B2B2B"/>
+                </a:solidFill>
+                <a:latin typeface="Calibri"/>
+              </a:rPr>
+              <a:t>–   </a:t>
+            </a:r>
+            <a:r>
+              <a:rPr sz="1600" b="1" i="0">
+                <a:solidFill>
+                  <a:srgbClr val="2B2B2B"/>
+                </a:solidFill>
+                <a:latin typeface="Calibri"/>
+              </a:rPr>
+              <a:t>Esto alimenta:</a:t>
+            </a:r>
+            <a:r>
+              <a:rPr sz="1600" b="0" i="0">
+                <a:solidFill>
+                  <a:srgbClr val="2B2B2B"/>
+                </a:solidFill>
+                <a:latin typeface="Calibri"/>
+              </a:rPr>
+              <a:t> </a:t>
+            </a:r>
+            <a:r>
+              <a:rPr sz="1600" b="1" i="0">
+                <a:solidFill>
+                  <a:srgbClr val="2B2B2B"/>
+                </a:solidFill>
+                <a:latin typeface="Calibri"/>
+              </a:rPr>
+              <a:t>ACA Final</a:t>
+            </a:r>
+            <a:r>
+              <a:rPr sz="1600" b="0" i="0">
+                <a:solidFill>
+                  <a:srgbClr val="2B2B2B"/>
+                </a:solidFill>
+                <a:latin typeface="Calibri"/>
+              </a:rPr>
+              <a:t> —tarea, 32%—, el documento que </a:t>
+            </a:r>
+            <a:r>
+              <a:rPr sz="1600" b="1" i="0">
+                <a:solidFill>
+                  <a:srgbClr val="2B2B2B"/>
+                </a:solidFill>
+                <a:latin typeface="Calibri"/>
+              </a:rPr>
+              <a:t>sí</a:t>
+            </a:r>
+            <a:r>
+              <a:rPr sz="1600" b="0" i="0">
+                <a:solidFill>
+                  <a:srgbClr val="2B2B2B"/>
+                </a:solidFill>
+                <a:latin typeface="Calibri"/>
+              </a:rPr>
+              <a:t> recibe </a:t>
+            </a:r>
+            <a:r>
+              <a:rPr sz="1600" b="1" i="0">
+                <a:solidFill>
+                  <a:srgbClr val="2B2B2B"/>
+                </a:solidFill>
+                <a:latin typeface="Calibri"/>
+              </a:rPr>
+              <a:t>el aula de su grupo</a:t>
+            </a:r>
+            <a:r>
+              <a:rPr sz="1600" b="0" i="0">
+                <a:solidFill>
+                  <a:srgbClr val="2B2B2B"/>
+                </a:solidFill>
+                <a:latin typeface="Calibri"/>
+              </a:rPr>
+              <a:t> en CDigital; cierra en la semana de la </a:t>
+            </a:r>
+            <a:r>
+              <a:rPr sz="1600" b="1" i="0">
+                <a:solidFill>
+                  <a:srgbClr val="2B2B2B"/>
+                </a:solidFill>
+                <a:latin typeface="Calibri"/>
+              </a:rPr>
+              <a:t>Sesión 13</a:t>
+            </a:r>
+            <a:r>
+              <a:rPr sz="1600" b="0" i="0">
+                <a:solidFill>
+                  <a:srgbClr val="2B2B2B"/>
+                </a:solidFill>
+                <a:latin typeface="Calibri"/>
+              </a:rPr>
+              <a:t>.</a:t>
+            </a:r>
+          </a:p>
+        </p:txBody>
+      </p:sp>
+      <p:sp>
+        <p:nvSpPr>
+          <p:cNvPr id="6" name="TextBox 5"/>
           <p:cNvSpPr txBox="1"/>
           <p:nvPr/>
         </p:nvSpPr>
@@ -9337,58 +9681,6 @@
                 <a:latin typeface="Calibri"/>
               </a:rPr>
               <a:t>21</a:t>
-            </a:r>
-          </a:p>
-        </p:txBody>
-      </p:sp>
-      <p:sp>
-        <p:nvSpPr>
-          <p:cNvPr id="6" name="TextBox 5"/>
-          <p:cNvSpPr txBox="1"/>
-          <p:nvPr/>
-        </p:nvSpPr>
-        <p:spPr>
-          <a:xfrm>
-            <a:off x="640080" y="5943600"/>
-            <a:ext cx="9997135" cy="457200"/>
-          </a:xfrm>
-          <a:prstGeom prst="rect">
-            <a:avLst/>
-          </a:prstGeom>
-          <a:noFill/>
-        </p:spPr>
-        <p:txBody>
-          <a:bodyPr wrap="square" anchor="t" lIns="0" rIns="0" tIns="0" bIns="0">
-            <a:spAutoFit/>
-          </a:bodyPr>
-          <a:lstStyle/>
-          <a:p>
-            <a:r>
-              <a:rPr sz="1200" b="0" i="1">
-                <a:solidFill>
-                  <a:srgbClr val="2B2B2B"/>
-                </a:solidFill>
-                <a:latin typeface="Calibri"/>
-              </a:rPr>
-              <a:t>Ejercicio de control en pareja: muéstrele su póster a un compañero durante </a:t>
-            </a:r>
-            <a:r>
-              <a:rPr sz="1200" b="1" i="1">
-                <a:solidFill>
-                  <a:srgbClr val="2B2B2B"/>
-                </a:solidFill>
-                <a:latin typeface="Calibri"/>
-              </a:rPr>
-              <a:t>30 segundos</a:t>
-            </a:r>
-            <a:r>
-              <a:rPr sz="1200" b="0" i="1">
-                <a:solidFill>
-                  <a:srgbClr val="2B2B2B"/>
-                </a:solidFill>
-                <a:latin typeface="Calibri"/>
-              </a:rPr>
-              <a:t> y quítelo. Si no puede repetirle su hallazgo principal, el póster todavía no funciona.</a:t>
             </a:r>
           </a:p>
         </p:txBody>
@@ -10055,7 +10347,7 @@
                           </a:solidFill>
                           <a:latin typeface="Calibri"/>
                         </a:rPr>
-                        <a:t>Reviso cada figura del artículo y del póster</a:t>
+                        <a:t>Reviso cada figura del documento y del póster</a:t>
                       </a:r>
                     </a:p>
                   </a:txBody>
@@ -10665,7 +10957,25 @@
                 </a:solidFill>
                 <a:latin typeface="Calibri"/>
               </a:rPr>
-              <a:t> `S11_PosterEvidencias_Apellido` a CDigital — [URL CDigital — campus del curso pendiente].</a:t>
+              <a:t> `S11_PosterEvidencias_Apellido` a CDigital — el aula de </a:t>
+            </a:r>
+            <a:r>
+              <a:rPr sz="1600" b="1" i="0">
+                <a:solidFill>
+                  <a:srgbClr val="2B2B2B"/>
+                </a:solidFill>
+                <a:latin typeface="Calibri"/>
+              </a:rPr>
+              <a:t>su grupo</a:t>
+            </a:r>
+            <a:r>
+              <a:rPr sz="1600" b="0" i="0">
+                <a:solidFill>
+                  <a:srgbClr val="2B2B2B"/>
+                </a:solidFill>
+                <a:latin typeface="Calibri"/>
+              </a:rPr>
+              <a:t> en CDigital.</a:t>
             </a:r>
           </a:p>
           <a:p>
@@ -10785,7 +11095,7 @@
                 </a:solidFill>
                 <a:latin typeface="Calibri"/>
               </a:rPr>
-              <a:t> los anexos y de referenciarlos desde el cuerpo del artículo.</a:t>
+              <a:t> los anexos y de referenciarlos desde el cuerpo del documento.</a:t>
             </a:r>
           </a:p>
           <a:p>
@@ -10869,7 +11179,7 @@
                 </a:solidFill>
                 <a:latin typeface="Calibri"/>
               </a:rPr>
-              <a:t>artículo, el póster y un cronómetro</a:t>
+              <a:t>documento, el póster y un cronómetro</a:t>
             </a:r>
             <a:r>
               <a:rPr sz="1500" b="0" i="0">
@@ -10961,6 +11271,1214 @@
 </file>
 
 <file path=ppt/slides/slide25.xml><?xml version="1.0" encoding="utf-8"?>
+<p:sld xmlns:a="http://schemas.openxmlformats.org/drawingml/2006/main" xmlns:p="http://schemas.openxmlformats.org/presentationml/2006/main" xmlns:r="http://schemas.openxmlformats.org/officeDocument/2006/relationships">
+  <p:cSld>
+    <p:bg>
+      <p:bgPr>
+        <a:solidFill>
+          <a:srgbClr val="FFFFFF"/>
+        </a:solidFill>
+        <a:effectLst/>
+      </p:bgPr>
+    </p:bg>
+    <p:spTree>
+      <p:nvGrpSpPr>
+        <p:cNvPr id="1" name=""/>
+        <p:cNvGrpSpPr/>
+        <p:nvPr/>
+      </p:nvGrpSpPr>
+      <p:grpSpPr/>
+      <p:sp>
+        <p:nvSpPr>
+          <p:cNvPr id="2" name="Rectangle 1"/>
+          <p:cNvSpPr/>
+          <p:nvPr/>
+        </p:nvSpPr>
+        <p:spPr>
+          <a:xfrm>
+            <a:off x="0" y="0"/>
+            <a:ext cx="12191695" cy="1188720"/>
+          </a:xfrm>
+          <a:prstGeom prst="rect">
+            <a:avLst/>
+          </a:prstGeom>
+          <a:solidFill>
+            <a:srgbClr val="0C2340"/>
+          </a:solidFill>
+          <a:ln>
+            <a:noFill/>
+          </a:ln>
+          <a:effectLst/>
+        </p:spPr>
+        <p:style>
+          <a:lnRef idx="1">
+            <a:schemeClr val="accent1"/>
+          </a:lnRef>
+          <a:fillRef idx="3">
+            <a:schemeClr val="accent1"/>
+          </a:fillRef>
+          <a:effectRef idx="2">
+            <a:schemeClr val="accent1"/>
+          </a:effectRef>
+          <a:fontRef idx="minor">
+            <a:schemeClr val="lt1"/>
+          </a:fontRef>
+        </p:style>
+        <p:txBody>
+          <a:bodyPr rtlCol="0" anchor="ctr"/>
+          <a:lstStyle/>
+          <a:p>
+            <a:pPr algn="ctr"/>
+          </a:p>
+        </p:txBody>
+      </p:sp>
+      <p:sp>
+        <p:nvSpPr>
+          <p:cNvPr id="3" name="TextBox 2"/>
+          <p:cNvSpPr txBox="1"/>
+          <p:nvPr/>
+        </p:nvSpPr>
+        <p:spPr>
+          <a:xfrm>
+            <a:off x="640080" y="0"/>
+            <a:ext cx="9082735" cy="1188720"/>
+          </a:xfrm>
+          <a:prstGeom prst="rect">
+            <a:avLst/>
+          </a:prstGeom>
+          <a:noFill/>
+        </p:spPr>
+        <p:txBody>
+          <a:bodyPr wrap="square" anchor="ctr" lIns="0" rIns="0" tIns="0" bIns="0">
+            <a:spAutoFit/>
+          </a:bodyPr>
+          <a:lstStyle/>
+          <a:p>
+            <a:pPr algn="ctr"/>
+            <a:r>
+              <a:rPr sz="2600" b="1" i="0">
+                <a:solidFill>
+                  <a:srgbClr val="FFFFFF"/>
+                </a:solidFill>
+                <a:latin typeface="Calibri"/>
+              </a:rPr>
+              <a:t>RUTA DE ENTREGABLES DEL CURSO</a:t>
+            </a:r>
+          </a:p>
+        </p:txBody>
+      </p:sp>
+      <p:sp>
+        <p:nvSpPr>
+          <p:cNvPr id="4" name="TextBox 3"/>
+          <p:cNvSpPr txBox="1"/>
+          <p:nvPr/>
+        </p:nvSpPr>
+        <p:spPr>
+          <a:xfrm>
+            <a:off x="640080" y="1280160"/>
+            <a:ext cx="10911535" cy="411480"/>
+          </a:xfrm>
+          <a:prstGeom prst="rect">
+            <a:avLst/>
+          </a:prstGeom>
+          <a:noFill/>
+        </p:spPr>
+        <p:txBody>
+          <a:bodyPr wrap="square" anchor="t" lIns="0" rIns="0" tIns="0" bIns="0">
+            <a:spAutoFit/>
+          </a:bodyPr>
+          <a:lstStyle/>
+          <a:p>
+            <a:pPr algn="ctr"/>
+            <a:r>
+              <a:rPr sz="1500" b="0" i="0">
+                <a:solidFill>
+                  <a:srgbClr val="2B2B2B"/>
+                </a:solidFill>
+                <a:latin typeface="Calibri"/>
+              </a:rPr>
+              <a:t>Sin fechas a propósito: aquí va </a:t>
+            </a:r>
+            <a:r>
+              <a:rPr sz="1500" b="1" i="0">
+                <a:solidFill>
+                  <a:srgbClr val="2B2B2B"/>
+                </a:solidFill>
+                <a:latin typeface="Calibri"/>
+              </a:rPr>
+              <a:t>en qué punto del curso</a:t>
+            </a:r>
+            <a:r>
+              <a:rPr sz="1500" b="0" i="0">
+                <a:solidFill>
+                  <a:srgbClr val="2B2B2B"/>
+                </a:solidFill>
+                <a:latin typeface="Calibri"/>
+              </a:rPr>
+              <a:t> cierra cada ítem · la ventana exacta la fija CDigital</a:t>
+            </a:r>
+          </a:p>
+        </p:txBody>
+      </p:sp>
+      <p:graphicFrame>
+        <p:nvGraphicFramePr>
+          <p:cNvPr id="5" name="Table 4"/>
+          <p:cNvGraphicFramePr>
+            <a:graphicFrameLocks noGrp="1"/>
+          </p:cNvGraphicFramePr>
+          <p:nvPr/>
+        </p:nvGraphicFramePr>
+        <p:xfrm>
+          <a:off x="640080" y="2011679"/>
+          <a:ext cx="10911533" cy="4297680"/>
+        </p:xfrm>
+        <a:graphic>
+          <a:graphicData uri="http://schemas.openxmlformats.org/drawingml/2006/table">
+            <a:tbl>
+              <a:tblPr>
+                <a:tableStyleId>{2D5ABB26-0587-4C30-8999-92F81FD0307C}</a:tableStyleId>
+              </a:tblPr>
+              <a:tblGrid>
+                <a:gridCol w="2659113"/>
+                <a:gridCol w="2659113"/>
+                <a:gridCol w="5593307"/>
+              </a:tblGrid>
+              <a:tr h="477520">
+                <a:tc>
+                  <a:txBody>
+                    <a:bodyPr/>
+                    <a:lstStyle/>
+                    <a:p>
+                      <a:pPr algn="l"/>
+                      <a:r>
+                        <a:rPr sz="1300" b="1" i="0">
+                          <a:solidFill>
+                            <a:srgbClr val="FFFFFF"/>
+                          </a:solidFill>
+                          <a:latin typeface="Calibri"/>
+                        </a:rPr>
+                        <a:t>Cierra en la semana de…</a:t>
+                      </a:r>
+                    </a:p>
+                  </a:txBody>
+                  <a:tcPr anchor="ctr" marL="109728" marR="91440" marT="36576" marB="36576">
+                    <a:solidFill>
+                      <a:srgbClr val="0C2340"/>
+                    </a:solidFill>
+                  </a:tcPr>
+                </a:tc>
+                <a:tc>
+                  <a:txBody>
+                    <a:bodyPr/>
+                    <a:lstStyle/>
+                    <a:p>
+                      <a:pPr algn="l"/>
+                      <a:r>
+                        <a:rPr sz="1300" b="1" i="0">
+                          <a:solidFill>
+                            <a:srgbClr val="FFFFFF"/>
+                          </a:solidFill>
+                          <a:latin typeface="Calibri"/>
+                        </a:rPr>
+                        <a:t>Entregable</a:t>
+                      </a:r>
+                    </a:p>
+                  </a:txBody>
+                  <a:tcPr anchor="ctr" marL="109728" marR="91440" marT="36576" marB="36576">
+                    <a:solidFill>
+                      <a:srgbClr val="0C2340"/>
+                    </a:solidFill>
+                  </a:tcPr>
+                </a:tc>
+                <a:tc>
+                  <a:txBody>
+                    <a:bodyPr/>
+                    <a:lstStyle/>
+                    <a:p>
+                      <a:pPr algn="l"/>
+                      <a:r>
+                        <a:rPr sz="1300" b="1" i="0">
+                          <a:solidFill>
+                            <a:srgbClr val="FFFFFF"/>
+                          </a:solidFill>
+                          <a:latin typeface="Calibri"/>
+                        </a:rPr>
+                        <a:t>Qué debes tener listo</a:t>
+                      </a:r>
+                    </a:p>
+                  </a:txBody>
+                  <a:tcPr anchor="ctr" marL="109728" marR="91440" marT="36576" marB="36576">
+                    <a:solidFill>
+                      <a:srgbClr val="0C2340"/>
+                    </a:solidFill>
+                  </a:tcPr>
+                </a:tc>
+              </a:tr>
+              <a:tr h="477520">
+                <a:tc>
+                  <a:txBody>
+                    <a:bodyPr/>
+                    <a:lstStyle/>
+                    <a:p>
+                      <a:pPr algn="l"/>
+                      <a:r>
+                        <a:rPr sz="1100" b="1" i="0">
+                          <a:solidFill>
+                            <a:srgbClr val="2B2B2B"/>
+                          </a:solidFill>
+                          <a:latin typeface="Calibri"/>
+                        </a:rPr>
+                        <a:t>Sesión 03</a:t>
+                      </a:r>
+                      <a:r>
+                        <a:rPr sz="1100" b="0" i="0">
+                          <a:solidFill>
+                            <a:srgbClr val="2B2B2B"/>
+                          </a:solidFill>
+                          <a:latin typeface="Calibri"/>
+                        </a:rPr>
+                        <a:t> · ya cerró</a:t>
+                      </a:r>
+                    </a:p>
+                  </a:txBody>
+                  <a:tcPr anchor="ctr" marL="109728" marR="91440" marT="36576" marB="36576">
+                    <a:solidFill>
+                      <a:srgbClr val="FFFFFF"/>
+                    </a:solidFill>
+                  </a:tcPr>
+                </a:tc>
+                <a:tc>
+                  <a:txBody>
+                    <a:bodyPr/>
+                    <a:lstStyle/>
+                    <a:p>
+                      <a:pPr algn="l"/>
+                      <a:r>
+                        <a:rPr sz="1100" b="1" i="0">
+                          <a:solidFill>
+                            <a:srgbClr val="2B2B2B"/>
+                          </a:solidFill>
+                          <a:latin typeface="Calibri"/>
+                        </a:rPr>
+                        <a:t>Quiz 1</a:t>
+                      </a:r>
+                      <a:r>
+                        <a:rPr sz="1100" b="0" i="0">
+                          <a:solidFill>
+                            <a:srgbClr val="2B2B2B"/>
+                          </a:solidFill>
+                          <a:latin typeface="Calibri"/>
+                        </a:rPr>
+                        <a:t> · Cuestionario · 6%</a:t>
+                      </a:r>
+                    </a:p>
+                  </a:txBody>
+                  <a:tcPr anchor="ctr" marL="109728" marR="91440" marT="36576" marB="36576">
+                    <a:solidFill>
+                      <a:srgbClr val="FFFFFF"/>
+                    </a:solidFill>
+                  </a:tcPr>
+                </a:tc>
+                <a:tc>
+                  <a:txBody>
+                    <a:bodyPr/>
+                    <a:lstStyle/>
+                    <a:p>
+                      <a:pPr algn="l"/>
+                      <a:r>
+                        <a:rPr sz="1100" b="0" i="0">
+                          <a:solidFill>
+                            <a:srgbClr val="2B2B2B"/>
+                          </a:solidFill>
+                          <a:latin typeface="Calibri"/>
+                        </a:rPr>
+                        <a:t>Repasa </a:t>
+                      </a:r>
+                      <a:r>
+                        <a:rPr sz="1100" b="1" i="0">
+                          <a:solidFill>
+                            <a:srgbClr val="2B2B2B"/>
+                          </a:solidFill>
+                          <a:latin typeface="Calibri"/>
+                        </a:rPr>
+                        <a:t>pregunta, objetivos y título</a:t>
+                      </a:r>
+                      <a:r>
+                        <a:rPr sz="1100" b="0" i="0">
+                          <a:solidFill>
+                            <a:srgbClr val="2B2B2B"/>
+                          </a:solidFill>
+                          <a:latin typeface="Calibri"/>
+                        </a:rPr>
+                        <a:t> y las variables de la pregunta-problema.</a:t>
+                      </a:r>
+                    </a:p>
+                  </a:txBody>
+                  <a:tcPr anchor="ctr" marL="109728" marR="91440" marT="36576" marB="36576">
+                    <a:solidFill>
+                      <a:srgbClr val="FFFFFF"/>
+                    </a:solidFill>
+                  </a:tcPr>
+                </a:tc>
+              </a:tr>
+              <a:tr h="477520">
+                <a:tc>
+                  <a:txBody>
+                    <a:bodyPr/>
+                    <a:lstStyle/>
+                    <a:p>
+                      <a:pPr algn="l"/>
+                      <a:r>
+                        <a:rPr sz="1100" b="1" i="0">
+                          <a:solidFill>
+                            <a:srgbClr val="2B2B2B"/>
+                          </a:solidFill>
+                          <a:latin typeface="Calibri"/>
+                        </a:rPr>
+                        <a:t>Sesión 06</a:t>
+                      </a:r>
+                      <a:r>
+                        <a:rPr sz="1100" b="0" i="0">
+                          <a:solidFill>
+                            <a:srgbClr val="2B2B2B"/>
+                          </a:solidFill>
+                          <a:latin typeface="Calibri"/>
+                        </a:rPr>
+                        <a:t> · ya cerró</a:t>
+                      </a:r>
+                    </a:p>
+                  </a:txBody>
+                  <a:tcPr anchor="ctr" marL="109728" marR="91440" marT="36576" marB="36576">
+                    <a:solidFill>
+                      <a:srgbClr val="F2F2F2"/>
+                    </a:solidFill>
+                  </a:tcPr>
+                </a:tc>
+                <a:tc>
+                  <a:txBody>
+                    <a:bodyPr/>
+                    <a:lstStyle/>
+                    <a:p>
+                      <a:pPr algn="l"/>
+                      <a:r>
+                        <a:rPr sz="1100" b="1" i="0">
+                          <a:solidFill>
+                            <a:srgbClr val="2B2B2B"/>
+                          </a:solidFill>
+                          <a:latin typeface="Calibri"/>
+                        </a:rPr>
+                        <a:t>Parcial 1</a:t>
+                      </a:r>
+                      <a:r>
+                        <a:rPr sz="1100" b="0" i="0">
+                          <a:solidFill>
+                            <a:srgbClr val="2B2B2B"/>
+                          </a:solidFill>
+                          <a:latin typeface="Calibri"/>
+                        </a:rPr>
+                        <a:t> · Cuestionario · 24%</a:t>
+                      </a:r>
+                    </a:p>
+                  </a:txBody>
+                  <a:tcPr anchor="ctr" marL="109728" marR="91440" marT="36576" marB="36576">
+                    <a:solidFill>
+                      <a:srgbClr val="F2F2F2"/>
+                    </a:solidFill>
+                  </a:tcPr>
+                </a:tc>
+                <a:tc>
+                  <a:txBody>
+                    <a:bodyPr/>
+                    <a:lstStyle/>
+                    <a:p>
+                      <a:pPr algn="l"/>
+                      <a:r>
+                        <a:rPr sz="1100" b="0" i="0">
+                          <a:solidFill>
+                            <a:srgbClr val="2B2B2B"/>
+                          </a:solidFill>
+                          <a:latin typeface="Calibri"/>
+                        </a:rPr>
+                        <a:t>Estudia la </a:t>
+                      </a:r>
+                      <a:r>
+                        <a:rPr sz="1100" b="1" i="0">
+                          <a:solidFill>
+                            <a:srgbClr val="2B2B2B"/>
+                          </a:solidFill>
+                          <a:latin typeface="Calibri"/>
+                        </a:rPr>
+                        <a:t>introducción</a:t>
+                      </a:r>
+                      <a:r>
+                        <a:rPr sz="1100" b="0" i="0">
+                          <a:solidFill>
+                            <a:srgbClr val="2B2B2B"/>
+                          </a:solidFill>
+                          <a:latin typeface="Calibri"/>
+                        </a:rPr>
+                        <a:t>, los referentes Fase I y el instrumento ya diseñado.</a:t>
+                      </a:r>
+                    </a:p>
+                  </a:txBody>
+                  <a:tcPr anchor="ctr" marL="109728" marR="91440" marT="36576" marB="36576">
+                    <a:solidFill>
+                      <a:srgbClr val="F2F2F2"/>
+                    </a:solidFill>
+                  </a:tcPr>
+                </a:tc>
+              </a:tr>
+              <a:tr h="477520">
+                <a:tc>
+                  <a:txBody>
+                    <a:bodyPr/>
+                    <a:lstStyle/>
+                    <a:p>
+                      <a:pPr algn="l"/>
+                      <a:r>
+                        <a:rPr sz="1100" b="1" i="0">
+                          <a:solidFill>
+                            <a:srgbClr val="2B2B2B"/>
+                          </a:solidFill>
+                          <a:latin typeface="Calibri"/>
+                        </a:rPr>
+                        <a:t>Sesión 08</a:t>
+                      </a:r>
+                      <a:r>
+                        <a:rPr sz="1100" b="0" i="0">
+                          <a:solidFill>
+                            <a:srgbClr val="2B2B2B"/>
+                          </a:solidFill>
+                          <a:latin typeface="Calibri"/>
+                        </a:rPr>
+                        <a:t> · ya cerró</a:t>
+                      </a:r>
+                    </a:p>
+                  </a:txBody>
+                  <a:tcPr anchor="ctr" marL="109728" marR="91440" marT="36576" marB="36576">
+                    <a:solidFill>
+                      <a:srgbClr val="FFFFFF"/>
+                    </a:solidFill>
+                  </a:tcPr>
+                </a:tc>
+                <a:tc>
+                  <a:txBody>
+                    <a:bodyPr/>
+                    <a:lstStyle/>
+                    <a:p>
+                      <a:pPr algn="l"/>
+                      <a:r>
+                        <a:rPr sz="1100" b="1" i="0">
+                          <a:solidFill>
+                            <a:srgbClr val="2B2B2B"/>
+                          </a:solidFill>
+                          <a:latin typeface="Calibri"/>
+                        </a:rPr>
+                        <a:t>Quiz 2</a:t>
+                      </a:r>
+                      <a:r>
+                        <a:rPr sz="1100" b="0" i="0">
+                          <a:solidFill>
+                            <a:srgbClr val="2B2B2B"/>
+                          </a:solidFill>
+                          <a:latin typeface="Calibri"/>
+                        </a:rPr>
+                        <a:t> · Cuestionario · 9%</a:t>
+                      </a:r>
+                    </a:p>
+                  </a:txBody>
+                  <a:tcPr anchor="ctr" marL="109728" marR="91440" marT="36576" marB="36576">
+                    <a:solidFill>
+                      <a:srgbClr val="FFFFFF"/>
+                    </a:solidFill>
+                  </a:tcPr>
+                </a:tc>
+                <a:tc>
+                  <a:txBody>
+                    <a:bodyPr/>
+                    <a:lstStyle/>
+                    <a:p>
+                      <a:pPr algn="l"/>
+                      <a:r>
+                        <a:rPr sz="1100" b="0" i="0">
+                          <a:solidFill>
+                            <a:srgbClr val="2B2B2B"/>
+                          </a:solidFill>
+                          <a:latin typeface="Calibri"/>
+                        </a:rPr>
+                        <a:t>Estudia </a:t>
+                      </a:r>
+                      <a:r>
+                        <a:rPr sz="1100" b="1" i="0">
+                          <a:solidFill>
+                            <a:srgbClr val="2B2B2B"/>
+                          </a:solidFill>
+                          <a:latin typeface="Calibri"/>
+                        </a:rPr>
+                        <a:t>comunidades de práctica</a:t>
+                      </a:r>
+                      <a:r>
+                        <a:rPr sz="1100" b="0" i="0">
+                          <a:solidFill>
+                            <a:srgbClr val="2B2B2B"/>
+                          </a:solidFill>
+                          <a:latin typeface="Calibri"/>
+                        </a:rPr>
+                        <a:t>, co-creación y análisis de datos.</a:t>
+                      </a:r>
+                    </a:p>
+                  </a:txBody>
+                  <a:tcPr anchor="ctr" marL="109728" marR="91440" marT="36576" marB="36576">
+                    <a:solidFill>
+                      <a:srgbClr val="FFFFFF"/>
+                    </a:solidFill>
+                  </a:tcPr>
+                </a:tc>
+              </a:tr>
+              <a:tr h="477520">
+                <a:tc>
+                  <a:txBody>
+                    <a:bodyPr/>
+                    <a:lstStyle/>
+                    <a:p>
+                      <a:pPr algn="l"/>
+                      <a:r>
+                        <a:rPr sz="1100" b="1" i="0">
+                          <a:solidFill>
+                            <a:srgbClr val="2B2B2B"/>
+                          </a:solidFill>
+                          <a:latin typeface="Calibri"/>
+                        </a:rPr>
+                        <a:t>Sesión 10</a:t>
+                      </a:r>
+                      <a:r>
+                        <a:rPr sz="1100" b="0" i="0">
+                          <a:solidFill>
+                            <a:srgbClr val="2B2B2B"/>
+                          </a:solidFill>
+                          <a:latin typeface="Calibri"/>
+                        </a:rPr>
+                        <a:t> · ya cerró</a:t>
+                      </a:r>
+                    </a:p>
+                  </a:txBody>
+                  <a:tcPr anchor="ctr" marL="109728" marR="91440" marT="36576" marB="36576">
+                    <a:solidFill>
+                      <a:srgbClr val="F2F2F2"/>
+                    </a:solidFill>
+                  </a:tcPr>
+                </a:tc>
+                <a:tc>
+                  <a:txBody>
+                    <a:bodyPr/>
+                    <a:lstStyle/>
+                    <a:p>
+                      <a:pPr algn="l"/>
+                      <a:r>
+                        <a:rPr sz="1100" b="1" i="0">
+                          <a:solidFill>
+                            <a:srgbClr val="2B2B2B"/>
+                          </a:solidFill>
+                          <a:latin typeface="Calibri"/>
+                        </a:rPr>
+                        <a:t>Parcial 2</a:t>
+                      </a:r>
+                      <a:r>
+                        <a:rPr sz="1100" b="0" i="0">
+                          <a:solidFill>
+                            <a:srgbClr val="2B2B2B"/>
+                          </a:solidFill>
+                          <a:latin typeface="Calibri"/>
+                        </a:rPr>
+                        <a:t> · Cuestionario · 21%</a:t>
+                      </a:r>
+                    </a:p>
+                  </a:txBody>
+                  <a:tcPr anchor="ctr" marL="109728" marR="91440" marT="36576" marB="36576">
+                    <a:solidFill>
+                      <a:srgbClr val="F2F2F2"/>
+                    </a:solidFill>
+                  </a:tcPr>
+                </a:tc>
+                <a:tc>
+                  <a:txBody>
+                    <a:bodyPr/>
+                    <a:lstStyle/>
+                    <a:p>
+                      <a:pPr algn="l"/>
+                      <a:r>
+                        <a:rPr sz="1100" b="0" i="0">
+                          <a:solidFill>
+                            <a:srgbClr val="2B2B2B"/>
+                          </a:solidFill>
+                          <a:latin typeface="Calibri"/>
+                        </a:rPr>
+                        <a:t>Estudia el cierre del </a:t>
+                      </a:r>
+                      <a:r>
+                        <a:rPr sz="1100" b="1" i="0">
+                          <a:solidFill>
+                            <a:srgbClr val="2B2B2B"/>
+                          </a:solidFill>
+                          <a:latin typeface="Calibri"/>
+                        </a:rPr>
+                        <a:t>marco teórico</a:t>
+                      </a:r>
+                      <a:r>
+                        <a:rPr sz="1100" b="0" i="0">
+                          <a:solidFill>
+                            <a:srgbClr val="2B2B2B"/>
+                          </a:solidFill>
+                          <a:latin typeface="Calibri"/>
+                        </a:rPr>
+                        <a:t>, los resultados y la discusión.</a:t>
+                      </a:r>
+                    </a:p>
+                  </a:txBody>
+                  <a:tcPr anchor="ctr" marL="109728" marR="91440" marT="36576" marB="36576">
+                    <a:solidFill>
+                      <a:srgbClr val="F2F2F2"/>
+                    </a:solidFill>
+                  </a:tcPr>
+                </a:tc>
+              </a:tr>
+              <a:tr h="477520">
+                <a:tc>
+                  <a:txBody>
+                    <a:bodyPr/>
+                    <a:lstStyle/>
+                    <a:p>
+                      <a:pPr algn="l"/>
+                      <a:r>
+                        <a:rPr sz="1100" b="1" i="0">
+                          <a:solidFill>
+                            <a:srgbClr val="2B2B2B"/>
+                          </a:solidFill>
+                          <a:latin typeface="Calibri"/>
+                        </a:rPr>
+                        <a:t>Sesión 12</a:t>
+                      </a:r>
+                      <a:r>
+                        <a:rPr sz="1100" b="0" i="0">
+                          <a:solidFill>
+                            <a:srgbClr val="2B2B2B"/>
+                          </a:solidFill>
+                          <a:latin typeface="Calibri"/>
+                        </a:rPr>
+                        <a:t> · pendiente</a:t>
+                      </a:r>
+                    </a:p>
+                  </a:txBody>
+                  <a:tcPr anchor="ctr" marL="109728" marR="91440" marT="36576" marB="36576">
+                    <a:solidFill>
+                      <a:srgbClr val="FFFFFF"/>
+                    </a:solidFill>
+                  </a:tcPr>
+                </a:tc>
+                <a:tc>
+                  <a:txBody>
+                    <a:bodyPr/>
+                    <a:lstStyle/>
+                    <a:p>
+                      <a:pPr algn="l"/>
+                      <a:r>
+                        <a:rPr sz="1100" b="1" i="0">
+                          <a:solidFill>
+                            <a:srgbClr val="2B2B2B"/>
+                          </a:solidFill>
+                          <a:latin typeface="Calibri"/>
+                        </a:rPr>
+                        <a:t>Quiz 3</a:t>
+                      </a:r>
+                      <a:r>
+                        <a:rPr sz="1100" b="0" i="0">
+                          <a:solidFill>
+                            <a:srgbClr val="2B2B2B"/>
+                          </a:solidFill>
+                          <a:latin typeface="Calibri"/>
+                        </a:rPr>
+                        <a:t> · Cuestionario · 4%</a:t>
+                      </a:r>
+                    </a:p>
+                  </a:txBody>
+                  <a:tcPr anchor="ctr" marL="109728" marR="91440" marT="36576" marB="36576">
+                    <a:solidFill>
+                      <a:srgbClr val="FFFFFF"/>
+                    </a:solidFill>
+                  </a:tcPr>
+                </a:tc>
+                <a:tc>
+                  <a:txBody>
+                    <a:bodyPr/>
+                    <a:lstStyle/>
+                    <a:p>
+                      <a:pPr algn="l"/>
+                      <a:r>
+                        <a:rPr sz="1100" b="0" i="0">
+                          <a:solidFill>
+                            <a:srgbClr val="2B2B2B"/>
+                          </a:solidFill>
+                          <a:latin typeface="Calibri"/>
+                        </a:rPr>
+                        <a:t>Ten claros </a:t>
+                      </a:r>
+                      <a:r>
+                        <a:rPr sz="1100" b="1" i="0">
+                          <a:solidFill>
+                            <a:srgbClr val="2B2B2B"/>
+                          </a:solidFill>
+                          <a:latin typeface="Calibri"/>
+                        </a:rPr>
+                        <a:t>resumen</a:t>
+                      </a:r>
+                      <a:r>
+                        <a:rPr sz="1100" b="0" i="0">
+                          <a:solidFill>
+                            <a:srgbClr val="2B2B2B"/>
+                          </a:solidFill>
+                          <a:latin typeface="Calibri"/>
+                        </a:rPr>
+                        <a:t>, palabras clave UNESCO, póster y verificación antiplagio.</a:t>
+                      </a:r>
+                    </a:p>
+                  </a:txBody>
+                  <a:tcPr anchor="ctr" marL="109728" marR="91440" marT="36576" marB="36576">
+                    <a:solidFill>
+                      <a:srgbClr val="FFFFFF"/>
+                    </a:solidFill>
+                  </a:tcPr>
+                </a:tc>
+              </a:tr>
+              <a:tr h="477520">
+                <a:tc>
+                  <a:txBody>
+                    <a:bodyPr/>
+                    <a:lstStyle/>
+                    <a:p>
+                      <a:pPr algn="l"/>
+                      <a:r>
+                        <a:rPr sz="1100" b="1" i="0">
+                          <a:solidFill>
+                            <a:srgbClr val="2B2B2B"/>
+                          </a:solidFill>
+                          <a:latin typeface="Calibri"/>
+                        </a:rPr>
+                        <a:t>Sesión 13</a:t>
+                      </a:r>
+                      <a:r>
+                        <a:rPr sz="1100" b="0" i="0">
+                          <a:solidFill>
+                            <a:srgbClr val="2B2B2B"/>
+                          </a:solidFill>
+                          <a:latin typeface="Calibri"/>
+                        </a:rPr>
+                        <a:t> · pendiente</a:t>
+                      </a:r>
+                    </a:p>
+                  </a:txBody>
+                  <a:tcPr anchor="ctr" marL="109728" marR="91440" marT="36576" marB="36576">
+                    <a:solidFill>
+                      <a:srgbClr val="F2F2F2"/>
+                    </a:solidFill>
+                  </a:tcPr>
+                </a:tc>
+                <a:tc>
+                  <a:txBody>
+                    <a:bodyPr/>
+                    <a:lstStyle/>
+                    <a:p>
+                      <a:pPr algn="l"/>
+                      <a:r>
+                        <a:rPr sz="1100" b="1" i="0">
+                          <a:solidFill>
+                            <a:srgbClr val="2B2B2B"/>
+                          </a:solidFill>
+                          <a:latin typeface="Calibri"/>
+                        </a:rPr>
+                        <a:t>ACA Final</a:t>
+                      </a:r>
+                      <a:r>
+                        <a:rPr sz="1100" b="0" i="0">
+                          <a:solidFill>
+                            <a:srgbClr val="2B2B2B"/>
+                          </a:solidFill>
+                          <a:latin typeface="Calibri"/>
+                        </a:rPr>
+                        <a:t> · Tarea · 32%</a:t>
+                      </a:r>
+                    </a:p>
+                  </a:txBody>
+                  <a:tcPr anchor="ctr" marL="109728" marR="91440" marT="36576" marB="36576">
+                    <a:solidFill>
+                      <a:srgbClr val="F2F2F2"/>
+                    </a:solidFill>
+                  </a:tcPr>
+                </a:tc>
+                <a:tc>
+                  <a:txBody>
+                    <a:bodyPr/>
+                    <a:lstStyle/>
+                    <a:p>
+                      <a:pPr algn="l"/>
+                      <a:r>
+                        <a:rPr sz="1100" b="0" i="0">
+                          <a:solidFill>
+                            <a:srgbClr val="2B2B2B"/>
+                          </a:solidFill>
+                          <a:latin typeface="Calibri"/>
+                        </a:rPr>
+                        <a:t>Sube el </a:t>
+                      </a:r>
+                      <a:r>
+                        <a:rPr sz="1100" b="1" i="0">
+                          <a:solidFill>
+                            <a:srgbClr val="2B2B2B"/>
+                          </a:solidFill>
+                          <a:latin typeface="Calibri"/>
+                        </a:rPr>
+                        <a:t>documento final</a:t>
+                      </a:r>
+                      <a:r>
+                        <a:rPr sz="1100" b="0" i="0">
+                          <a:solidFill>
+                            <a:srgbClr val="2B2B2B"/>
+                          </a:solidFill>
+                          <a:latin typeface="Calibri"/>
+                        </a:rPr>
+                        <a:t> en plantilla APA CUN: mínimo 4.000 palabras y 50 referencias.</a:t>
+                      </a:r>
+                    </a:p>
+                  </a:txBody>
+                  <a:tcPr anchor="ctr" marL="109728" marR="91440" marT="36576" marB="36576">
+                    <a:solidFill>
+                      <a:srgbClr val="F2F2F2"/>
+                    </a:solidFill>
+                  </a:tcPr>
+                </a:tc>
+              </a:tr>
+              <a:tr h="477520">
+                <a:tc>
+                  <a:txBody>
+                    <a:bodyPr/>
+                    <a:lstStyle/>
+                    <a:p>
+                      <a:pPr algn="l"/>
+                      <a:r>
+                        <a:rPr sz="1100" b="1" i="0">
+                          <a:solidFill>
+                            <a:srgbClr val="2B2B2B"/>
+                          </a:solidFill>
+                          <a:latin typeface="Calibri"/>
+                        </a:rPr>
+                        <a:t>Sesión 14</a:t>
+                      </a:r>
+                      <a:r>
+                        <a:rPr sz="1100" b="0" i="0">
+                          <a:solidFill>
+                            <a:srgbClr val="2B2B2B"/>
+                          </a:solidFill>
+                          <a:latin typeface="Calibri"/>
+                        </a:rPr>
+                        <a:t> · pendiente</a:t>
+                      </a:r>
+                    </a:p>
+                  </a:txBody>
+                  <a:tcPr anchor="ctr" marL="109728" marR="91440" marT="36576" marB="36576">
+                    <a:solidFill>
+                      <a:srgbClr val="FFFFFF"/>
+                    </a:solidFill>
+                  </a:tcPr>
+                </a:tc>
+                <a:tc>
+                  <a:txBody>
+                    <a:bodyPr/>
+                    <a:lstStyle/>
+                    <a:p>
+                      <a:pPr algn="l"/>
+                      <a:r>
+                        <a:rPr sz="1100" b="1" i="0">
+                          <a:solidFill>
+                            <a:srgbClr val="2B2B2B"/>
+                          </a:solidFill>
+                          <a:latin typeface="Calibri"/>
+                        </a:rPr>
+                        <a:t>Autoevaluación</a:t>
+                      </a:r>
+                      <a:r>
+                        <a:rPr sz="1100" b="0" i="0">
+                          <a:solidFill>
+                            <a:srgbClr val="2B2B2B"/>
+                          </a:solidFill>
+                          <a:latin typeface="Calibri"/>
+                        </a:rPr>
+                        <a:t> · Cuestionario · 2%</a:t>
+                      </a:r>
+                    </a:p>
+                  </a:txBody>
+                  <a:tcPr anchor="ctr" marL="109728" marR="91440" marT="36576" marB="36576">
+                    <a:solidFill>
+                      <a:srgbClr val="FFFFFF"/>
+                    </a:solidFill>
+                  </a:tcPr>
+                </a:tc>
+                <a:tc>
+                  <a:txBody>
+                    <a:bodyPr/>
+                    <a:lstStyle/>
+                    <a:p>
+                      <a:pPr algn="l"/>
+                      <a:r>
+                        <a:rPr sz="1100" b="0" i="0">
+                          <a:solidFill>
+                            <a:srgbClr val="2B2B2B"/>
+                          </a:solidFill>
+                          <a:latin typeface="Calibri"/>
+                        </a:rPr>
+                        <a:t>Diligénciala </a:t>
+                      </a:r>
+                      <a:r>
+                        <a:rPr sz="1100" b="1" i="0">
+                          <a:solidFill>
+                            <a:srgbClr val="2B2B2B"/>
+                          </a:solidFill>
+                          <a:latin typeface="Calibri"/>
+                        </a:rPr>
+                        <a:t>tú</a:t>
+                      </a:r>
+                      <a:r>
+                        <a:rPr sz="1100" b="0" i="0">
+                          <a:solidFill>
+                            <a:srgbClr val="2B2B2B"/>
+                          </a:solidFill>
+                          <a:latin typeface="Calibri"/>
+                        </a:rPr>
+                        <a:t>, dentro de su ventana, sobre tu participación real.</a:t>
+                      </a:r>
+                    </a:p>
+                  </a:txBody>
+                  <a:tcPr anchor="ctr" marL="109728" marR="91440" marT="36576" marB="36576">
+                    <a:solidFill>
+                      <a:srgbClr val="FFFFFF"/>
+                    </a:solidFill>
+                  </a:tcPr>
+                </a:tc>
+              </a:tr>
+              <a:tr h="477520">
+                <a:tc>
+                  <a:txBody>
+                    <a:bodyPr/>
+                    <a:lstStyle/>
+                    <a:p>
+                      <a:pPr algn="l"/>
+                      <a:r>
+                        <a:rPr sz="1100" b="1" i="0">
+                          <a:solidFill>
+                            <a:srgbClr val="2B2B2B"/>
+                          </a:solidFill>
+                          <a:latin typeface="Calibri"/>
+                        </a:rPr>
+                        <a:t>Sesión 14</a:t>
+                      </a:r>
+                      <a:r>
+                        <a:rPr sz="1100" b="0" i="0">
+                          <a:solidFill>
+                            <a:srgbClr val="2B2B2B"/>
+                          </a:solidFill>
+                          <a:latin typeface="Calibri"/>
+                        </a:rPr>
+                        <a:t> · pendiente</a:t>
+                      </a:r>
+                    </a:p>
+                  </a:txBody>
+                  <a:tcPr anchor="ctr" marL="109728" marR="91440" marT="36576" marB="36576">
+                    <a:solidFill>
+                      <a:srgbClr val="F2F2F2"/>
+                    </a:solidFill>
+                  </a:tcPr>
+                </a:tc>
+                <a:tc>
+                  <a:txBody>
+                    <a:bodyPr/>
+                    <a:lstStyle/>
+                    <a:p>
+                      <a:pPr algn="l"/>
+                      <a:r>
+                        <a:rPr sz="1100" b="1" i="0">
+                          <a:solidFill>
+                            <a:srgbClr val="2B2B2B"/>
+                          </a:solidFill>
+                          <a:latin typeface="Calibri"/>
+                        </a:rPr>
+                        <a:t>Coevaluación</a:t>
+                      </a:r>
+                      <a:r>
+                        <a:rPr sz="1100" b="0" i="0">
+                          <a:solidFill>
+                            <a:srgbClr val="2B2B2B"/>
+                          </a:solidFill>
+                          <a:latin typeface="Calibri"/>
+                        </a:rPr>
+                        <a:t> · Foro · 2%</a:t>
+                      </a:r>
+                    </a:p>
+                  </a:txBody>
+                  <a:tcPr anchor="ctr" marL="109728" marR="91440" marT="36576" marB="36576">
+                    <a:solidFill>
+                      <a:srgbClr val="F2F2F2"/>
+                    </a:solidFill>
+                  </a:tcPr>
+                </a:tc>
+                <a:tc>
+                  <a:txBody>
+                    <a:bodyPr/>
+                    <a:lstStyle/>
+                    <a:p>
+                      <a:pPr algn="l"/>
+                      <a:r>
+                        <a:rPr sz="1100" b="1" i="0">
+                          <a:solidFill>
+                            <a:srgbClr val="2B2B2B"/>
+                          </a:solidFill>
+                          <a:latin typeface="Calibri"/>
+                        </a:rPr>
+                        <a:t>Publica</a:t>
+                      </a:r>
+                      <a:r>
+                        <a:rPr sz="1100" b="0" i="0">
+                          <a:solidFill>
+                            <a:srgbClr val="2B2B2B"/>
+                          </a:solidFill>
+                          <a:latin typeface="Calibri"/>
+                        </a:rPr>
+                        <a:t> tu aporte dentro de la ventana: un borrador sin enviar no cuenta.</a:t>
+                      </a:r>
+                    </a:p>
+                  </a:txBody>
+                  <a:tcPr anchor="ctr" marL="109728" marR="91440" marT="36576" marB="36576">
+                    <a:solidFill>
+                      <a:srgbClr val="F2F2F2"/>
+                    </a:solidFill>
+                  </a:tcPr>
+                </a:tc>
+              </a:tr>
+            </a:tbl>
+          </a:graphicData>
+        </a:graphic>
+      </p:graphicFrame>
+      <p:sp>
+        <p:nvSpPr>
+          <p:cNvPr id="6" name="TextBox 5"/>
+          <p:cNvSpPr txBox="1"/>
+          <p:nvPr/>
+        </p:nvSpPr>
+        <p:spPr>
+          <a:xfrm>
+            <a:off x="640080" y="6080760"/>
+            <a:ext cx="10911535" cy="548640"/>
+          </a:xfrm>
+          <a:prstGeom prst="rect">
+            <a:avLst/>
+          </a:prstGeom>
+          <a:noFill/>
+        </p:spPr>
+        <p:txBody>
+          <a:bodyPr wrap="square" anchor="t" lIns="0" rIns="0" tIns="0" bIns="0">
+            <a:spAutoFit/>
+          </a:bodyPr>
+          <a:lstStyle/>
+          <a:p>
+            <a:r>
+              <a:rPr sz="1200" b="0" i="1">
+                <a:solidFill>
+                  <a:srgbClr val="2B2B2B"/>
+                </a:solidFill>
+                <a:latin typeface="Calibri"/>
+              </a:rPr>
+              <a:t>Esta misma tabla va al final de todas las sesiones. La </a:t>
+            </a:r>
+            <a:r>
+              <a:rPr sz="1200" b="1" i="1">
+                <a:solidFill>
+                  <a:srgbClr val="2B2B2B"/>
+                </a:solidFill>
+                <a:latin typeface="Calibri"/>
+              </a:rPr>
+              <a:t>fecha</a:t>
+            </a:r>
+            <a:r>
+              <a:rPr sz="1200" b="0" i="1">
+                <a:solidFill>
+                  <a:srgbClr val="2B2B2B"/>
+                </a:solidFill>
+                <a:latin typeface="Calibri"/>
+              </a:rPr>
+              <a:t> de cada ventana está en el enunciado del ítem (`Clases/Recursos/ACAs/`) y en el aula: si el aula y cualquier otro material se contradicen, </a:t>
+            </a:r>
+            <a:r>
+              <a:rPr sz="1200" b="1" i="1">
+                <a:solidFill>
+                  <a:srgbClr val="2B2B2B"/>
+                </a:solidFill>
+                <a:latin typeface="Calibri"/>
+              </a:rPr>
+              <a:t>manda el aula</a:t>
+            </a:r>
+            <a:r>
+              <a:rPr sz="1200" b="0" i="1">
+                <a:solidFill>
+                  <a:srgbClr val="2B2B2B"/>
+                </a:solidFill>
+                <a:latin typeface="Calibri"/>
+              </a:rPr>
+              <a:t>.</a:t>
+            </a:r>
+          </a:p>
+        </p:txBody>
+      </p:sp>
+      <p:sp>
+        <p:nvSpPr>
+          <p:cNvPr id="7" name="TextBox 6"/>
+          <p:cNvSpPr txBox="1"/>
+          <p:nvPr/>
+        </p:nvSpPr>
+        <p:spPr>
+          <a:xfrm>
+            <a:off x="11094415" y="6446520"/>
+            <a:ext cx="548640" cy="274320"/>
+          </a:xfrm>
+          <a:prstGeom prst="rect">
+            <a:avLst/>
+          </a:prstGeom>
+          <a:noFill/>
+        </p:spPr>
+        <p:txBody>
+          <a:bodyPr wrap="square" anchor="t" lIns="0" rIns="0" tIns="0" bIns="0">
+            <a:spAutoFit/>
+          </a:bodyPr>
+          <a:lstStyle/>
+          <a:p>
+            <a:pPr algn="r"/>
+            <a:r>
+              <a:rPr sz="1000" b="1" i="0">
+                <a:solidFill>
+                  <a:srgbClr val="8F989D"/>
+                </a:solidFill>
+                <a:latin typeface="Calibri"/>
+              </a:rPr>
+              <a:t>25</a:t>
+            </a:r>
+          </a:p>
+        </p:txBody>
+      </p:sp>
+    </p:spTree>
+  </p:cSld>
+  <p:clrMapOvr>
+    <a:masterClrMapping/>
+  </p:clrMapOvr>
+</p:sld>
+</file>
+
+<file path=ppt/slides/slide26.xml><?xml version="1.0" encoding="utf-8"?>
 <p:sld xmlns:a="http://schemas.openxmlformats.org/drawingml/2006/main" xmlns:p="http://schemas.openxmlformats.org/presentationml/2006/main" xmlns:r="http://schemas.openxmlformats.org/officeDocument/2006/relationships">
   <p:cSld>
     <p:bg>
@@ -11396,7 +12914,7 @@
                 </a:solidFill>
                 <a:latin typeface="Calibri"/>
               </a:rPr>
-              <a:t> el artículo con letra 8 y márgenes de 5 mm (el error clásico, y se detecta a tres metros).</a:t>
+              <a:t> el documento con letra 8 y márgenes de 5 mm (el error clásico, y se detecta a tres metros).</a:t>
             </a:r>
           </a:p>
           <a:p>
@@ -12856,7 +14374,7 @@
                 </a:solidFill>
                 <a:latin typeface="Calibri"/>
               </a:rPr>
-              <a:t>, no en el orden del artículo.</a:t>
+              <a:t>, no en el orden del documento.</a:t>
             </a:r>
           </a:p>
           <a:p>
@@ -14042,7 +15560,25 @@
                 </a:solidFill>
                 <a:latin typeface="Calibri"/>
               </a:rPr>
-              <a:t> Suba el PDF a CDigital — [URL CDigital — campus del curso pendiente].</a:t>
+              <a:t> Suba el PDF a CDigital — el aula de </a:t>
+            </a:r>
+            <a:r>
+              <a:rPr sz="1600" b="1" i="0">
+                <a:solidFill>
+                  <a:srgbClr val="2B2B2B"/>
+                </a:solidFill>
+                <a:latin typeface="Calibri"/>
+              </a:rPr>
+              <a:t>su grupo</a:t>
+            </a:r>
+            <a:r>
+              <a:rPr sz="1600" b="0" i="0">
+                <a:solidFill>
+                  <a:srgbClr val="2B2B2B"/>
+                </a:solidFill>
+                <a:latin typeface="Calibri"/>
+              </a:rPr>
+              <a:t> en CDigital.</a:t>
             </a:r>
           </a:p>
         </p:txBody>
